--- a/schedule/05-building-context-part-2/05-building-context-part-2.pptx
+++ b/schedule/05-building-context-part-2/05-building-context-part-2.pptx
@@ -4,21 +4,24 @@
   <p:sldMasterIdLst>
     <p:sldMasterId id="2147483648" r:id="rId1"/>
   </p:sldMasterIdLst>
+  <p:notesMasterIdLst>
+    <p:notesMasterId r:id="rId14"/>
+  </p:notesMasterIdLst>
   <p:sldIdLst>
-    <p:sldId id="256" r:id="rId7"/>
-    <p:sldId id="257" r:id="rId9"/>
-    <p:sldId id="258" r:id="rId10"/>
-    <p:sldId id="259" r:id="rId11"/>
-    <p:sldId id="260" r:id="rId12"/>
-    <p:sldId id="261" r:id="rId13"/>
-    <p:sldId id="262" r:id="rId14"/>
-    <p:sldId id="263" r:id="rId15"/>
-    <p:sldId id="264" r:id="rId16"/>
-    <p:sldId id="265" r:id="rId17"/>
-    <p:sldId id="266" r:id="rId18"/>
-    <p:sldId id="267" r:id="rId19"/>
+    <p:sldId id="256" r:id="rId2"/>
+    <p:sldId id="257" r:id="rId3"/>
+    <p:sldId id="258" r:id="rId4"/>
+    <p:sldId id="259" r:id="rId5"/>
+    <p:sldId id="260" r:id="rId6"/>
+    <p:sldId id="261" r:id="rId7"/>
+    <p:sldId id="262" r:id="rId8"/>
+    <p:sldId id="263" r:id="rId9"/>
+    <p:sldId id="264" r:id="rId10"/>
+    <p:sldId id="265" r:id="rId11"/>
+    <p:sldId id="266" r:id="rId12"/>
+    <p:sldId id="267" r:id="rId13"/>
   </p:sldIdLst>
-  <p:sldSz cx="18288000" cy="10287000" type="screen4x3"/>
+  <p:sldSz cx="18288000" cy="10287000"/>
   <p:notesSz cx="6858000" cy="9144000"/>
   <p:defaultTextStyle>
     <a:defPPr>
@@ -115,11 +118,27 @@
       </a:defRPr>
     </a:lvl9pPr>
   </p:defaultTextStyle>
+  <p:extLst>
+    <p:ext uri="{EFAFB233-063F-42B5-8137-9DF3F51BA10A}">
+      <p15:sldGuideLst xmlns:p15="http://schemas.microsoft.com/office/powerpoint/2012/main">
+        <p15:guide id="1" orient="horz" pos="2160">
+          <p15:clr>
+            <a:srgbClr val="A4A3A4"/>
+          </p15:clr>
+        </p15:guide>
+        <p15:guide id="2" pos="2880">
+          <p15:clr>
+            <a:srgbClr val="A4A3A4"/>
+          </p15:clr>
+        </p15:guide>
+      </p15:sldGuideLst>
+    </p:ext>
+  </p:extLst>
 </p:presentation>
 </file>
 
 <file path=ppt/notesMasters/notesMaster1.xml><?xml version="1.0" encoding="utf-8"?>
-<p:notesMaster xmlns:a="http://schemas.openxmlformats.org/drawingml/2006/main" xmlns:p="http://schemas.openxmlformats.org/presentationml/2006/main" xmlns:r="http://schemas.openxmlformats.org/officeDocument/2006/relationships">
+<p:notesMaster xmlns:a="http://schemas.openxmlformats.org/drawingml/2006/main" xmlns:r="http://schemas.openxmlformats.org/officeDocument/2006/relationships" xmlns:p="http://schemas.openxmlformats.org/presentationml/2006/main">
   <p:cSld>
     <p:bg>
       <p:bgRef idx="1001">
@@ -140,241 +159,16 @@
           <a:chExt cx="0" cy="0"/>
         </a:xfrm>
       </p:grpSpPr>
-      <p:sp>
-        <p:nvSpPr>
-          <p:cNvPr id="2" name="Header Placeholder 1"/>
-          <p:cNvSpPr>
-            <a:spLocks noGrp="1"/>
-          </p:cNvSpPr>
-          <p:nvPr>
-            <p:ph type="hdr" sz="quarter"/>
-          </p:nvPr>
-        </p:nvSpPr>
-        <p:spPr>
-          <a:xfrm>
-            <a:off x="0" y="0"/>
-            <a:ext cx="2971800" cy="457200"/>
-          </a:xfrm>
-          <a:prstGeom prst="rect">
-            <a:avLst/>
-          </a:prstGeom>
-        </p:spPr>
-        <p:txBody>
-          <a:bodyPr vert="horz" lIns="91440" tIns="45720" rIns="91440" bIns="45720" rtlCol="0"/>
-          <a:lstStyle>
-            <a:lvl1pPr algn="l">
-              <a:defRPr sz="1200"/>
-            </a:lvl1pPr>
-          </a:lstStyle>
-          <a:p>
-            <a:endParaRPr lang="en-US"/>
-          </a:p>
-        </p:txBody>
-      </p:sp>
-      <p:sp>
-        <p:nvSpPr>
-          <p:cNvPr id="3" name="Date Placeholder 2"/>
-          <p:cNvSpPr>
-            <a:spLocks noGrp="1"/>
-          </p:cNvSpPr>
-          <p:nvPr>
-            <p:ph type="dt" idx="1"/>
-          </p:nvPr>
-        </p:nvSpPr>
-        <p:spPr>
-          <a:xfrm>
-            <a:off x="3884613" y="0"/>
-            <a:ext cx="2971800" cy="457200"/>
-          </a:xfrm>
-          <a:prstGeom prst="rect">
-            <a:avLst/>
-          </a:prstGeom>
-        </p:spPr>
-        <p:txBody>
-          <a:bodyPr vert="horz" lIns="91440" tIns="45720" rIns="91440" bIns="45720" rtlCol="0"/>
-          <a:lstStyle>
-            <a:lvl1pPr algn="r">
-              <a:defRPr sz="1200"/>
-            </a:lvl1pPr>
-          </a:lstStyle>
-          <a:p>
-            <a:fld id="{0F89C1C7-3DCD-1040-A9CF-14679D8B5DDD}" type="datetimeFigureOut">
-              <a:rPr lang="en-US" smtClean="0"/>
-              <a:t>10/17/16</a:t>
-            </a:fld>
-            <a:endParaRPr lang="en-US"/>
-          </a:p>
-        </p:txBody>
-      </p:sp>
-      <p:sp>
-        <p:nvSpPr>
-          <p:cNvPr id="4" name="Slide Image Placeholder 3"/>
-          <p:cNvSpPr>
-            <a:spLocks noGrp="1" noRot="1" noChangeAspect="1"/>
-          </p:cNvSpPr>
-          <p:nvPr>
-            <p:ph type="sldImg" idx="2"/>
-          </p:nvPr>
-        </p:nvSpPr>
-        <p:spPr>
-          <a:xfrm>
-            <a:off x="1143000" y="685800"/>
-            <a:ext cx="4572000" cy="3429000"/>
-          </a:xfrm>
-          <a:prstGeom prst="rect">
-            <a:avLst/>
-          </a:prstGeom>
-          <a:noFill/>
-          <a:ln w="12700">
-            <a:solidFill>
-              <a:prstClr val="black"/>
-            </a:solidFill>
-          </a:ln>
-        </p:spPr>
-        <p:txBody>
-          <a:bodyPr vert="horz" lIns="91440" tIns="45720" rIns="91440" bIns="45720" rtlCol="0" anchor="ctr"/>
-          <a:lstStyle/>
-          <a:p>
-            <a:endParaRPr lang="en-US"/>
-          </a:p>
-        </p:txBody>
-      </p:sp>
-      <p:sp>
-        <p:nvSpPr>
-          <p:cNvPr id="5" name="Notes Placeholder 4"/>
-          <p:cNvSpPr>
-            <a:spLocks noGrp="1"/>
-          </p:cNvSpPr>
-          <p:nvPr>
-            <p:ph type="body" sz="quarter" idx="3"/>
-          </p:nvPr>
-        </p:nvSpPr>
-        <p:spPr>
-          <a:xfrm>
-            <a:off x="685800" y="4343400"/>
-            <a:ext cx="5486400" cy="4114800"/>
-          </a:xfrm>
-          <a:prstGeom prst="rect">
-            <a:avLst/>
-          </a:prstGeom>
-        </p:spPr>
-        <p:txBody>
-          <a:bodyPr vert="horz" lIns="91440" tIns="45720" rIns="91440" bIns="45720" rtlCol="0"/>
-          <a:lstStyle/>
-          <a:p>
-            <a:pPr lvl="0"/>
-            <a:r>
-              <a:rPr lang="en-US" smtClean="0"/>
-              <a:t>Click to edit Master text styles</a:t>
-            </a:r>
-          </a:p>
-          <a:p>
-            <a:pPr lvl="1"/>
-            <a:r>
-              <a:rPr lang="en-US" smtClean="0"/>
-              <a:t>Second level</a:t>
-            </a:r>
-          </a:p>
-          <a:p>
-            <a:pPr lvl="2"/>
-            <a:r>
-              <a:rPr lang="en-US" smtClean="0"/>
-              <a:t>Third level</a:t>
-            </a:r>
-          </a:p>
-          <a:p>
-            <a:pPr lvl="3"/>
-            <a:r>
-              <a:rPr lang="en-US" smtClean="0"/>
-              <a:t>Fourth level</a:t>
-            </a:r>
-          </a:p>
-          <a:p>
-            <a:pPr lvl="4"/>
-            <a:r>
-              <a:rPr lang="en-US" smtClean="0"/>
-              <a:t>Fifth level</a:t>
-            </a:r>
-            <a:endParaRPr lang="en-US"/>
-          </a:p>
-        </p:txBody>
-      </p:sp>
-      <p:sp>
-        <p:nvSpPr>
-          <p:cNvPr id="6" name="Footer Placeholder 5"/>
-          <p:cNvSpPr>
-            <a:spLocks noGrp="1"/>
-          </p:cNvSpPr>
-          <p:nvPr>
-            <p:ph type="ftr" sz="quarter" idx="4"/>
-          </p:nvPr>
-        </p:nvSpPr>
-        <p:spPr>
-          <a:xfrm>
-            <a:off x="0" y="8685213"/>
-            <a:ext cx="2971800" cy="457200"/>
-          </a:xfrm>
-          <a:prstGeom prst="rect">
-            <a:avLst/>
-          </a:prstGeom>
-        </p:spPr>
-        <p:txBody>
-          <a:bodyPr vert="horz" lIns="91440" tIns="45720" rIns="91440" bIns="45720" rtlCol="0" anchor="b"/>
-          <a:lstStyle>
-            <a:lvl1pPr algn="l">
-              <a:defRPr sz="1200"/>
-            </a:lvl1pPr>
-          </a:lstStyle>
-          <a:p>
-            <a:endParaRPr lang="en-US"/>
-          </a:p>
-        </p:txBody>
-      </p:sp>
-      <p:sp>
-        <p:nvSpPr>
-          <p:cNvPr id="7" name="Slide Number Placeholder 6"/>
-          <p:cNvSpPr>
-            <a:spLocks noGrp="1"/>
-          </p:cNvSpPr>
-          <p:nvPr>
-            <p:ph type="sldNum" sz="quarter" idx="5"/>
-          </p:nvPr>
-        </p:nvSpPr>
-        <p:spPr>
-          <a:xfrm>
-            <a:off x="3884613" y="8685213"/>
-            <a:ext cx="2971800" cy="457200"/>
-          </a:xfrm>
-          <a:prstGeom prst="rect">
-            <a:avLst/>
-          </a:prstGeom>
-        </p:spPr>
-        <p:txBody>
-          <a:bodyPr vert="horz" lIns="91440" tIns="45720" rIns="91440" bIns="45720" rtlCol="0" anchor="b"/>
-          <a:lstStyle>
-            <a:lvl1pPr algn="r">
-              <a:defRPr sz="1200"/>
-            </a:lvl1pPr>
-          </a:lstStyle>
-          <a:p>
-            <a:fld id="{BB5E49A5-4136-284D-997B-48E1D791AD67}" type="slidenum">
-              <a:rPr lang="en-US" smtClean="0"/>
-              <a:t>‹#›</a:t>
-            </a:fld>
-            <a:endParaRPr lang="en-US"/>
-          </a:p>
-        </p:txBody>
-      </p:sp>
     </p:spTree>
     <p:extLst>
       <p:ext uri="{BB962C8B-B14F-4D97-AF65-F5344CB8AC3E}">
-        <p14:creationId xmlns:p14="http://schemas.microsoft.com/office/powerpoint/2010/main" val="2623252185"/>
+        <p14:creationId xmlns:p14="http://schemas.microsoft.com/office/powerpoint/2010/main" val="1268008816"/>
       </p:ext>
     </p:extLst>
   </p:cSld>
   <p:clrMap bg1="lt1" tx1="dk1" bg2="lt2" tx2="dk2" accent1="accent1" accent2="accent2" accent3="accent3" accent4="accent4" accent5="accent5" accent6="accent6" hlink="hlink" folHlink="folHlink"/>
   <p:notesStyle>
-    <a:lvl1pPr marL="0" algn="l" defTabSz="457200" rtl="0" eaLnBrk="1" latinLnBrk="0" hangingPunct="1">
+    <a:lvl1pPr marL="0" algn="l" defTabSz="914400" rtl="0" eaLnBrk="1" latinLnBrk="0" hangingPunct="1">
       <a:defRPr sz="1200" kern="1200">
         <a:solidFill>
           <a:schemeClr val="tx1"/>
@@ -384,7 +178,7 @@
         <a:cs typeface="+mn-cs"/>
       </a:defRPr>
     </a:lvl1pPr>
-    <a:lvl2pPr marL="457200" algn="l" defTabSz="457200" rtl="0" eaLnBrk="1" latinLnBrk="0" hangingPunct="1">
+    <a:lvl2pPr marL="457200" algn="l" defTabSz="914400" rtl="0" eaLnBrk="1" latinLnBrk="0" hangingPunct="1">
       <a:defRPr sz="1200" kern="1200">
         <a:solidFill>
           <a:schemeClr val="tx1"/>
@@ -394,7 +188,7 @@
         <a:cs typeface="+mn-cs"/>
       </a:defRPr>
     </a:lvl2pPr>
-    <a:lvl3pPr marL="914400" algn="l" defTabSz="457200" rtl="0" eaLnBrk="1" latinLnBrk="0" hangingPunct="1">
+    <a:lvl3pPr marL="914400" algn="l" defTabSz="914400" rtl="0" eaLnBrk="1" latinLnBrk="0" hangingPunct="1">
       <a:defRPr sz="1200" kern="1200">
         <a:solidFill>
           <a:schemeClr val="tx1"/>
@@ -404,7 +198,7 @@
         <a:cs typeface="+mn-cs"/>
       </a:defRPr>
     </a:lvl3pPr>
-    <a:lvl4pPr marL="1371600" algn="l" defTabSz="457200" rtl="0" eaLnBrk="1" latinLnBrk="0" hangingPunct="1">
+    <a:lvl4pPr marL="1371600" algn="l" defTabSz="914400" rtl="0" eaLnBrk="1" latinLnBrk="0" hangingPunct="1">
       <a:defRPr sz="1200" kern="1200">
         <a:solidFill>
           <a:schemeClr val="tx1"/>
@@ -414,7 +208,7 @@
         <a:cs typeface="+mn-cs"/>
       </a:defRPr>
     </a:lvl4pPr>
-    <a:lvl5pPr marL="1828800" algn="l" defTabSz="457200" rtl="0" eaLnBrk="1" latinLnBrk="0" hangingPunct="1">
+    <a:lvl5pPr marL="1828800" algn="l" defTabSz="914400" rtl="0" eaLnBrk="1" latinLnBrk="0" hangingPunct="1">
       <a:defRPr sz="1200" kern="1200">
         <a:solidFill>
           <a:schemeClr val="tx1"/>
@@ -424,7 +218,7 @@
         <a:cs typeface="+mn-cs"/>
       </a:defRPr>
     </a:lvl5pPr>
-    <a:lvl6pPr marL="2286000" algn="l" defTabSz="457200" rtl="0" eaLnBrk="1" latinLnBrk="0" hangingPunct="1">
+    <a:lvl6pPr marL="2286000" algn="l" defTabSz="914400" rtl="0" eaLnBrk="1" latinLnBrk="0" hangingPunct="1">
       <a:defRPr sz="1200" kern="1200">
         <a:solidFill>
           <a:schemeClr val="tx1"/>
@@ -434,7 +228,7 @@
         <a:cs typeface="+mn-cs"/>
       </a:defRPr>
     </a:lvl6pPr>
-    <a:lvl7pPr marL="2743200" algn="l" defTabSz="457200" rtl="0" eaLnBrk="1" latinLnBrk="0" hangingPunct="1">
+    <a:lvl7pPr marL="2743200" algn="l" defTabSz="914400" rtl="0" eaLnBrk="1" latinLnBrk="0" hangingPunct="1">
       <a:defRPr sz="1200" kern="1200">
         <a:solidFill>
           <a:schemeClr val="tx1"/>
@@ -444,7 +238,7 @@
         <a:cs typeface="+mn-cs"/>
       </a:defRPr>
     </a:lvl7pPr>
-    <a:lvl8pPr marL="3200400" algn="l" defTabSz="457200" rtl="0" eaLnBrk="1" latinLnBrk="0" hangingPunct="1">
+    <a:lvl8pPr marL="3200400" algn="l" defTabSz="914400" rtl="0" eaLnBrk="1" latinLnBrk="0" hangingPunct="1">
       <a:defRPr sz="1200" kern="1200">
         <a:solidFill>
           <a:schemeClr val="tx1"/>
@@ -454,7 +248,7 @@
         <a:cs typeface="+mn-cs"/>
       </a:defRPr>
     </a:lvl8pPr>
-    <a:lvl9pPr marL="3657600" algn="l" defTabSz="457200" rtl="0" eaLnBrk="1" latinLnBrk="0" hangingPunct="1">
+    <a:lvl9pPr marL="3657600" algn="l" defTabSz="914400" rtl="0" eaLnBrk="1" latinLnBrk="0" hangingPunct="1">
       <a:defRPr sz="1200" kern="1200">
         <a:solidFill>
           <a:schemeClr val="tx1"/>
@@ -469,7 +263,7 @@
 </file>
 
 <file path=ppt/notesSlides/notesSlide1.xml><?xml version="1.0" encoding="utf-8"?>
-<p:notes xmlns:a="http://schemas.openxmlformats.org/drawingml/2006/main" xmlns:p="http://schemas.openxmlformats.org/presentationml/2006/main" xmlns:r="http://schemas.openxmlformats.org/officeDocument/2006/relationships">
+<p:notes xmlns:a="http://schemas.openxmlformats.org/drawingml/2006/main" xmlns:r="http://schemas.openxmlformats.org/officeDocument/2006/relationships" xmlns:p="http://schemas.openxmlformats.org/presentationml/2006/main">
   <p:cSld>
     <p:spTree>
       <p:nvGrpSpPr>
@@ -489,7 +283,7 @@
         <p:nvSpPr>
           <p:cNvPr id="2" name="Slide Image Placeholder 1"/>
           <p:cNvSpPr>
-            <a:spLocks noGrp="1"/>
+            <a:spLocks noGrp="1" noRot="1" noChangeAspect="1"/>
           </p:cNvSpPr>
           <p:nvPr>
             <p:ph type="sldImg" idx="2"/>
@@ -504,7 +298,7 @@
             <a:spLocks noGrp="1"/>
           </p:cNvSpPr>
           <p:nvPr>
-            <p:ph type="body" idx="3" sz="quarter"/>
+            <p:ph type="body" sz="quarter" idx="3"/>
           </p:nvPr>
         </p:nvSpPr>
         <p:spPr/>
@@ -525,7 +319,7 @@
             <a:spLocks noGrp="1"/>
           </p:cNvSpPr>
           <p:nvPr>
-            <p:ph type="sldNum" idx="5" sz="quarter"/>
+            <p:ph type="sldNum" sz="quarter" idx="5"/>
           </p:nvPr>
         </p:nvSpPr>
         <p:spPr/>
@@ -539,7 +333,7 @@
 </file>
 
 <file path=ppt/notesSlides/notesSlide10.xml><?xml version="1.0" encoding="utf-8"?>
-<p:notes xmlns:a="http://schemas.openxmlformats.org/drawingml/2006/main" xmlns:p="http://schemas.openxmlformats.org/presentationml/2006/main" xmlns:r="http://schemas.openxmlformats.org/officeDocument/2006/relationships">
+<p:notes xmlns:a="http://schemas.openxmlformats.org/drawingml/2006/main" xmlns:r="http://schemas.openxmlformats.org/officeDocument/2006/relationships" xmlns:p="http://schemas.openxmlformats.org/presentationml/2006/main">
   <p:cSld>
     <p:spTree>
       <p:nvGrpSpPr>
@@ -559,7 +353,7 @@
         <p:nvSpPr>
           <p:cNvPr id="2" name="Slide Image Placeholder 1"/>
           <p:cNvSpPr>
-            <a:spLocks noGrp="1"/>
+            <a:spLocks noGrp="1" noRot="1" noChangeAspect="1"/>
           </p:cNvSpPr>
           <p:nvPr>
             <p:ph type="sldImg" idx="2"/>
@@ -574,7 +368,7 @@
             <a:spLocks noGrp="1"/>
           </p:cNvSpPr>
           <p:nvPr>
-            <p:ph type="body" idx="3" sz="quarter"/>
+            <p:ph type="body" sz="quarter" idx="3"/>
           </p:nvPr>
         </p:nvSpPr>
         <p:spPr/>
@@ -595,7 +389,7 @@
             <a:spLocks noGrp="1"/>
           </p:cNvSpPr>
           <p:nvPr>
-            <p:ph type="sldNum" idx="5" sz="quarter"/>
+            <p:ph type="sldNum" sz="quarter" idx="5"/>
           </p:nvPr>
         </p:nvSpPr>
         <p:spPr/>
@@ -609,7 +403,7 @@
 </file>
 
 <file path=ppt/notesSlides/notesSlide11.xml><?xml version="1.0" encoding="utf-8"?>
-<p:notes xmlns:a="http://schemas.openxmlformats.org/drawingml/2006/main" xmlns:p="http://schemas.openxmlformats.org/presentationml/2006/main" xmlns:r="http://schemas.openxmlformats.org/officeDocument/2006/relationships">
+<p:notes xmlns:a="http://schemas.openxmlformats.org/drawingml/2006/main" xmlns:r="http://schemas.openxmlformats.org/officeDocument/2006/relationships" xmlns:p="http://schemas.openxmlformats.org/presentationml/2006/main">
   <p:cSld>
     <p:spTree>
       <p:nvGrpSpPr>
@@ -629,7 +423,7 @@
         <p:nvSpPr>
           <p:cNvPr id="2" name="Slide Image Placeholder 1"/>
           <p:cNvSpPr>
-            <a:spLocks noGrp="1"/>
+            <a:spLocks noGrp="1" noRot="1" noChangeAspect="1"/>
           </p:cNvSpPr>
           <p:nvPr>
             <p:ph type="sldImg" idx="2"/>
@@ -644,7 +438,7 @@
             <a:spLocks noGrp="1"/>
           </p:cNvSpPr>
           <p:nvPr>
-            <p:ph type="body" idx="3" sz="quarter"/>
+            <p:ph type="body" sz="quarter" idx="3"/>
           </p:nvPr>
         </p:nvSpPr>
         <p:spPr/>
@@ -665,7 +459,7 @@
             <a:spLocks noGrp="1"/>
           </p:cNvSpPr>
           <p:nvPr>
-            <p:ph type="sldNum" idx="5" sz="quarter"/>
+            <p:ph type="sldNum" sz="quarter" idx="5"/>
           </p:nvPr>
         </p:nvSpPr>
         <p:spPr/>
@@ -679,7 +473,7 @@
 </file>
 
 <file path=ppt/notesSlides/notesSlide12.xml><?xml version="1.0" encoding="utf-8"?>
-<p:notes xmlns:a="http://schemas.openxmlformats.org/drawingml/2006/main" xmlns:p="http://schemas.openxmlformats.org/presentationml/2006/main" xmlns:r="http://schemas.openxmlformats.org/officeDocument/2006/relationships">
+<p:notes xmlns:a="http://schemas.openxmlformats.org/drawingml/2006/main" xmlns:r="http://schemas.openxmlformats.org/officeDocument/2006/relationships" xmlns:p="http://schemas.openxmlformats.org/presentationml/2006/main">
   <p:cSld>
     <p:spTree>
       <p:nvGrpSpPr>
@@ -699,7 +493,7 @@
         <p:nvSpPr>
           <p:cNvPr id="2" name="Slide Image Placeholder 1"/>
           <p:cNvSpPr>
-            <a:spLocks noGrp="1"/>
+            <a:spLocks noGrp="1" noRot="1" noChangeAspect="1"/>
           </p:cNvSpPr>
           <p:nvPr>
             <p:ph type="sldImg" idx="2"/>
@@ -714,7 +508,7 @@
             <a:spLocks noGrp="1"/>
           </p:cNvSpPr>
           <p:nvPr>
-            <p:ph type="body" idx="3" sz="quarter"/>
+            <p:ph type="body" sz="quarter" idx="3"/>
           </p:nvPr>
         </p:nvSpPr>
         <p:spPr/>
@@ -735,7 +529,7 @@
             <a:spLocks noGrp="1"/>
           </p:cNvSpPr>
           <p:nvPr>
-            <p:ph type="sldNum" idx="5" sz="quarter"/>
+            <p:ph type="sldNum" sz="quarter" idx="5"/>
           </p:nvPr>
         </p:nvSpPr>
         <p:spPr/>
@@ -749,7 +543,7 @@
 </file>
 
 <file path=ppt/notesSlides/notesSlide2.xml><?xml version="1.0" encoding="utf-8"?>
-<p:notes xmlns:a="http://schemas.openxmlformats.org/drawingml/2006/main" xmlns:p="http://schemas.openxmlformats.org/presentationml/2006/main" xmlns:r="http://schemas.openxmlformats.org/officeDocument/2006/relationships">
+<p:notes xmlns:a="http://schemas.openxmlformats.org/drawingml/2006/main" xmlns:r="http://schemas.openxmlformats.org/officeDocument/2006/relationships" xmlns:p="http://schemas.openxmlformats.org/presentationml/2006/main">
   <p:cSld>
     <p:spTree>
       <p:nvGrpSpPr>
@@ -769,7 +563,7 @@
         <p:nvSpPr>
           <p:cNvPr id="2" name="Slide Image Placeholder 1"/>
           <p:cNvSpPr>
-            <a:spLocks noGrp="1"/>
+            <a:spLocks noGrp="1" noRot="1" noChangeAspect="1"/>
           </p:cNvSpPr>
           <p:nvPr>
             <p:ph type="sldImg" idx="2"/>
@@ -784,7 +578,7 @@
             <a:spLocks noGrp="1"/>
           </p:cNvSpPr>
           <p:nvPr>
-            <p:ph type="body" idx="3" sz="quarter"/>
+            <p:ph type="body" sz="quarter" idx="3"/>
           </p:nvPr>
         </p:nvSpPr>
         <p:spPr/>
@@ -805,7 +599,7 @@
             <a:spLocks noGrp="1"/>
           </p:cNvSpPr>
           <p:nvPr>
-            <p:ph type="sldNum" idx="5" sz="quarter"/>
+            <p:ph type="sldNum" sz="quarter" idx="5"/>
           </p:nvPr>
         </p:nvSpPr>
         <p:spPr/>
@@ -819,7 +613,7 @@
 </file>
 
 <file path=ppt/notesSlides/notesSlide3.xml><?xml version="1.0" encoding="utf-8"?>
-<p:notes xmlns:a="http://schemas.openxmlformats.org/drawingml/2006/main" xmlns:p="http://schemas.openxmlformats.org/presentationml/2006/main" xmlns:r="http://schemas.openxmlformats.org/officeDocument/2006/relationships">
+<p:notes xmlns:a="http://schemas.openxmlformats.org/drawingml/2006/main" xmlns:r="http://schemas.openxmlformats.org/officeDocument/2006/relationships" xmlns:p="http://schemas.openxmlformats.org/presentationml/2006/main">
   <p:cSld>
     <p:spTree>
       <p:nvGrpSpPr>
@@ -839,7 +633,7 @@
         <p:nvSpPr>
           <p:cNvPr id="2" name="Slide Image Placeholder 1"/>
           <p:cNvSpPr>
-            <a:spLocks noGrp="1"/>
+            <a:spLocks noGrp="1" noRot="1" noChangeAspect="1"/>
           </p:cNvSpPr>
           <p:nvPr>
             <p:ph type="sldImg" idx="2"/>
@@ -854,7 +648,7 @@
             <a:spLocks noGrp="1"/>
           </p:cNvSpPr>
           <p:nvPr>
-            <p:ph type="body" idx="3" sz="quarter"/>
+            <p:ph type="body" sz="quarter" idx="3"/>
           </p:nvPr>
         </p:nvSpPr>
         <p:spPr/>
@@ -875,7 +669,7 @@
             <a:spLocks noGrp="1"/>
           </p:cNvSpPr>
           <p:nvPr>
-            <p:ph type="sldNum" idx="5" sz="quarter"/>
+            <p:ph type="sldNum" sz="quarter" idx="5"/>
           </p:nvPr>
         </p:nvSpPr>
         <p:spPr/>
@@ -889,7 +683,7 @@
 </file>
 
 <file path=ppt/notesSlides/notesSlide4.xml><?xml version="1.0" encoding="utf-8"?>
-<p:notes xmlns:a="http://schemas.openxmlformats.org/drawingml/2006/main" xmlns:p="http://schemas.openxmlformats.org/presentationml/2006/main" xmlns:r="http://schemas.openxmlformats.org/officeDocument/2006/relationships">
+<p:notes xmlns:a="http://schemas.openxmlformats.org/drawingml/2006/main" xmlns:r="http://schemas.openxmlformats.org/officeDocument/2006/relationships" xmlns:p="http://schemas.openxmlformats.org/presentationml/2006/main">
   <p:cSld>
     <p:spTree>
       <p:nvGrpSpPr>
@@ -909,7 +703,7 @@
         <p:nvSpPr>
           <p:cNvPr id="2" name="Slide Image Placeholder 1"/>
           <p:cNvSpPr>
-            <a:spLocks noGrp="1"/>
+            <a:spLocks noGrp="1" noRot="1" noChangeAspect="1"/>
           </p:cNvSpPr>
           <p:nvPr>
             <p:ph type="sldImg" idx="2"/>
@@ -924,7 +718,7 @@
             <a:spLocks noGrp="1"/>
           </p:cNvSpPr>
           <p:nvPr>
-            <p:ph type="body" idx="3" sz="quarter"/>
+            <p:ph type="body" sz="quarter" idx="3"/>
           </p:nvPr>
         </p:nvSpPr>
         <p:spPr/>
@@ -945,7 +739,7 @@
             <a:spLocks noGrp="1"/>
           </p:cNvSpPr>
           <p:nvPr>
-            <p:ph type="sldNum" idx="5" sz="quarter"/>
+            <p:ph type="sldNum" sz="quarter" idx="5"/>
           </p:nvPr>
         </p:nvSpPr>
         <p:spPr/>
@@ -959,7 +753,7 @@
 </file>
 
 <file path=ppt/notesSlides/notesSlide5.xml><?xml version="1.0" encoding="utf-8"?>
-<p:notes xmlns:a="http://schemas.openxmlformats.org/drawingml/2006/main" xmlns:p="http://schemas.openxmlformats.org/presentationml/2006/main" xmlns:r="http://schemas.openxmlformats.org/officeDocument/2006/relationships">
+<p:notes xmlns:a="http://schemas.openxmlformats.org/drawingml/2006/main" xmlns:r="http://schemas.openxmlformats.org/officeDocument/2006/relationships" xmlns:p="http://schemas.openxmlformats.org/presentationml/2006/main">
   <p:cSld>
     <p:spTree>
       <p:nvGrpSpPr>
@@ -979,7 +773,7 @@
         <p:nvSpPr>
           <p:cNvPr id="2" name="Slide Image Placeholder 1"/>
           <p:cNvSpPr>
-            <a:spLocks noGrp="1"/>
+            <a:spLocks noGrp="1" noRot="1" noChangeAspect="1"/>
           </p:cNvSpPr>
           <p:nvPr>
             <p:ph type="sldImg" idx="2"/>
@@ -994,7 +788,7 @@
             <a:spLocks noGrp="1"/>
           </p:cNvSpPr>
           <p:nvPr>
-            <p:ph type="body" idx="3" sz="quarter"/>
+            <p:ph type="body" sz="quarter" idx="3"/>
           </p:nvPr>
         </p:nvSpPr>
         <p:spPr/>
@@ -1015,7 +809,7 @@
             <a:spLocks noGrp="1"/>
           </p:cNvSpPr>
           <p:nvPr>
-            <p:ph type="sldNum" idx="5" sz="quarter"/>
+            <p:ph type="sldNum" sz="quarter" idx="5"/>
           </p:nvPr>
         </p:nvSpPr>
         <p:spPr/>
@@ -1029,7 +823,7 @@
 </file>
 
 <file path=ppt/notesSlides/notesSlide6.xml><?xml version="1.0" encoding="utf-8"?>
-<p:notes xmlns:a="http://schemas.openxmlformats.org/drawingml/2006/main" xmlns:p="http://schemas.openxmlformats.org/presentationml/2006/main" xmlns:r="http://schemas.openxmlformats.org/officeDocument/2006/relationships">
+<p:notes xmlns:a="http://schemas.openxmlformats.org/drawingml/2006/main" xmlns:r="http://schemas.openxmlformats.org/officeDocument/2006/relationships" xmlns:p="http://schemas.openxmlformats.org/presentationml/2006/main">
   <p:cSld>
     <p:spTree>
       <p:nvGrpSpPr>
@@ -1049,7 +843,7 @@
         <p:nvSpPr>
           <p:cNvPr id="2" name="Slide Image Placeholder 1"/>
           <p:cNvSpPr>
-            <a:spLocks noGrp="1"/>
+            <a:spLocks noGrp="1" noRot="1" noChangeAspect="1"/>
           </p:cNvSpPr>
           <p:nvPr>
             <p:ph type="sldImg" idx="2"/>
@@ -1064,7 +858,7 @@
             <a:spLocks noGrp="1"/>
           </p:cNvSpPr>
           <p:nvPr>
-            <p:ph type="body" idx="3" sz="quarter"/>
+            <p:ph type="body" sz="quarter" idx="3"/>
           </p:nvPr>
         </p:nvSpPr>
         <p:spPr/>
@@ -1085,7 +879,7 @@
             <a:spLocks noGrp="1"/>
           </p:cNvSpPr>
           <p:nvPr>
-            <p:ph type="sldNum" idx="5" sz="quarter"/>
+            <p:ph type="sldNum" sz="quarter" idx="5"/>
           </p:nvPr>
         </p:nvSpPr>
         <p:spPr/>
@@ -1099,7 +893,7 @@
 </file>
 
 <file path=ppt/notesSlides/notesSlide7.xml><?xml version="1.0" encoding="utf-8"?>
-<p:notes xmlns:a="http://schemas.openxmlformats.org/drawingml/2006/main" xmlns:p="http://schemas.openxmlformats.org/presentationml/2006/main" xmlns:r="http://schemas.openxmlformats.org/officeDocument/2006/relationships">
+<p:notes xmlns:a="http://schemas.openxmlformats.org/drawingml/2006/main" xmlns:r="http://schemas.openxmlformats.org/officeDocument/2006/relationships" xmlns:p="http://schemas.openxmlformats.org/presentationml/2006/main">
   <p:cSld>
     <p:spTree>
       <p:nvGrpSpPr>
@@ -1119,7 +913,7 @@
         <p:nvSpPr>
           <p:cNvPr id="2" name="Slide Image Placeholder 1"/>
           <p:cNvSpPr>
-            <a:spLocks noGrp="1"/>
+            <a:spLocks noGrp="1" noRot="1" noChangeAspect="1"/>
           </p:cNvSpPr>
           <p:nvPr>
             <p:ph type="sldImg" idx="2"/>
@@ -1134,7 +928,7 @@
             <a:spLocks noGrp="1"/>
           </p:cNvSpPr>
           <p:nvPr>
-            <p:ph type="body" idx="3" sz="quarter"/>
+            <p:ph type="body" sz="quarter" idx="3"/>
           </p:nvPr>
         </p:nvSpPr>
         <p:spPr/>
@@ -1155,7 +949,7 @@
             <a:spLocks noGrp="1"/>
           </p:cNvSpPr>
           <p:nvPr>
-            <p:ph type="sldNum" idx="5" sz="quarter"/>
+            <p:ph type="sldNum" sz="quarter" idx="5"/>
           </p:nvPr>
         </p:nvSpPr>
         <p:spPr/>
@@ -1169,7 +963,7 @@
 </file>
 
 <file path=ppt/notesSlides/notesSlide8.xml><?xml version="1.0" encoding="utf-8"?>
-<p:notes xmlns:a="http://schemas.openxmlformats.org/drawingml/2006/main" xmlns:p="http://schemas.openxmlformats.org/presentationml/2006/main" xmlns:r="http://schemas.openxmlformats.org/officeDocument/2006/relationships">
+<p:notes xmlns:a="http://schemas.openxmlformats.org/drawingml/2006/main" xmlns:r="http://schemas.openxmlformats.org/officeDocument/2006/relationships" xmlns:p="http://schemas.openxmlformats.org/presentationml/2006/main">
   <p:cSld>
     <p:spTree>
       <p:nvGrpSpPr>
@@ -1189,7 +983,7 @@
         <p:nvSpPr>
           <p:cNvPr id="2" name="Slide Image Placeholder 1"/>
           <p:cNvSpPr>
-            <a:spLocks noGrp="1"/>
+            <a:spLocks noGrp="1" noRot="1" noChangeAspect="1"/>
           </p:cNvSpPr>
           <p:nvPr>
             <p:ph type="sldImg" idx="2"/>
@@ -1204,7 +998,7 @@
             <a:spLocks noGrp="1"/>
           </p:cNvSpPr>
           <p:nvPr>
-            <p:ph type="body" idx="3" sz="quarter"/>
+            <p:ph type="body" sz="quarter" idx="3"/>
           </p:nvPr>
         </p:nvSpPr>
         <p:spPr/>
@@ -1225,7 +1019,7 @@
             <a:spLocks noGrp="1"/>
           </p:cNvSpPr>
           <p:nvPr>
-            <p:ph type="sldNum" idx="5" sz="quarter"/>
+            <p:ph type="sldNum" sz="quarter" idx="5"/>
           </p:nvPr>
         </p:nvSpPr>
         <p:spPr/>
@@ -1239,7 +1033,7 @@
 </file>
 
 <file path=ppt/notesSlides/notesSlide9.xml><?xml version="1.0" encoding="utf-8"?>
-<p:notes xmlns:a="http://schemas.openxmlformats.org/drawingml/2006/main" xmlns:p="http://schemas.openxmlformats.org/presentationml/2006/main" xmlns:r="http://schemas.openxmlformats.org/officeDocument/2006/relationships">
+<p:notes xmlns:a="http://schemas.openxmlformats.org/drawingml/2006/main" xmlns:r="http://schemas.openxmlformats.org/officeDocument/2006/relationships" xmlns:p="http://schemas.openxmlformats.org/presentationml/2006/main">
   <p:cSld>
     <p:spTree>
       <p:nvGrpSpPr>
@@ -1259,7 +1053,7 @@
         <p:nvSpPr>
           <p:cNvPr id="2" name="Slide Image Placeholder 1"/>
           <p:cNvSpPr>
-            <a:spLocks noGrp="1"/>
+            <a:spLocks noGrp="1" noRot="1" noChangeAspect="1"/>
           </p:cNvSpPr>
           <p:nvPr>
             <p:ph type="sldImg" idx="2"/>
@@ -1274,7 +1068,7 @@
             <a:spLocks noGrp="1"/>
           </p:cNvSpPr>
           <p:nvPr>
-            <p:ph type="body" idx="3" sz="quarter"/>
+            <p:ph type="body" sz="quarter" idx="3"/>
           </p:nvPr>
         </p:nvSpPr>
         <p:spPr/>
@@ -1295,7 +1089,7 @@
             <a:spLocks noGrp="1"/>
           </p:cNvSpPr>
           <p:nvPr>
-            <p:ph type="sldNum" idx="5" sz="quarter"/>
+            <p:ph type="sldNum" sz="quarter" idx="5"/>
           </p:nvPr>
         </p:nvSpPr>
         <p:spPr/>
@@ -1346,10 +1140,9 @@
           <a:lstStyle/>
           <a:p>
             <a:r>
-              <a:rPr lang="en-US" smtClean="0"/>
+              <a:rPr lang="en-US"/>
               <a:t>Click to edit Master title style</a:t>
             </a:r>
-            <a:endParaRPr lang="en-US"/>
           </a:p>
         </p:txBody>
       </p:sp>
@@ -1465,10 +1258,9 @@
           </a:lstStyle>
           <a:p>
             <a:r>
-              <a:rPr lang="en-US" smtClean="0"/>
+              <a:rPr lang="en-US"/>
               <a:t>Click to edit Master subtitle style</a:t>
             </a:r>
-            <a:endParaRPr lang="en-US"/>
           </a:p>
         </p:txBody>
       </p:sp>
@@ -1489,7 +1281,7 @@
           <a:p>
             <a:fld id="{5BCAD085-E8A6-8845-BD4E-CB4CCA059FC4}" type="datetimeFigureOut">
               <a:rPr lang="en-US" smtClean="0"/>
-              <a:t>1/27/13</a:t>
+              <a:t>5/6/26</a:t>
             </a:fld>
             <a:endParaRPr lang="en-US"/>
           </a:p>
@@ -1583,10 +1375,9 @@
           <a:lstStyle/>
           <a:p>
             <a:r>
-              <a:rPr lang="en-US" smtClean="0"/>
+              <a:rPr lang="en-US"/>
               <a:t>Click to edit Master title style</a:t>
             </a:r>
-            <a:endParaRPr lang="en-US"/>
           </a:p>
         </p:txBody>
       </p:sp>
@@ -1607,38 +1398,37 @@
           <a:p>
             <a:pPr lvl="0"/>
             <a:r>
-              <a:rPr lang="en-US" smtClean="0"/>
+              <a:rPr lang="en-US"/>
               <a:t>Click to edit Master text styles</a:t>
             </a:r>
           </a:p>
           <a:p>
             <a:pPr lvl="1"/>
             <a:r>
-              <a:rPr lang="en-US" smtClean="0"/>
+              <a:rPr lang="en-US"/>
               <a:t>Second level</a:t>
             </a:r>
           </a:p>
           <a:p>
             <a:pPr lvl="2"/>
             <a:r>
-              <a:rPr lang="en-US" smtClean="0"/>
+              <a:rPr lang="en-US"/>
               <a:t>Third level</a:t>
             </a:r>
           </a:p>
           <a:p>
             <a:pPr lvl="3"/>
             <a:r>
-              <a:rPr lang="en-US" smtClean="0"/>
+              <a:rPr lang="en-US"/>
               <a:t>Fourth level</a:t>
             </a:r>
           </a:p>
           <a:p>
             <a:pPr lvl="4"/>
             <a:r>
-              <a:rPr lang="en-US" smtClean="0"/>
+              <a:rPr lang="en-US"/>
               <a:t>Fifth level</a:t>
             </a:r>
-            <a:endParaRPr lang="en-US"/>
           </a:p>
         </p:txBody>
       </p:sp>
@@ -1659,7 +1449,7 @@
           <a:p>
             <a:fld id="{5BCAD085-E8A6-8845-BD4E-CB4CCA059FC4}" type="datetimeFigureOut">
               <a:rPr lang="en-US" smtClean="0"/>
-              <a:t>1/27/13</a:t>
+              <a:t>5/6/26</a:t>
             </a:fld>
             <a:endParaRPr lang="en-US"/>
           </a:p>
@@ -1758,10 +1548,9 @@
           <a:lstStyle/>
           <a:p>
             <a:r>
-              <a:rPr lang="en-US" smtClean="0"/>
+              <a:rPr lang="en-US"/>
               <a:t>Click to edit Master title style</a:t>
             </a:r>
-            <a:endParaRPr lang="en-US"/>
           </a:p>
         </p:txBody>
       </p:sp>
@@ -1787,38 +1576,37 @@
           <a:p>
             <a:pPr lvl="0"/>
             <a:r>
-              <a:rPr lang="en-US" smtClean="0"/>
+              <a:rPr lang="en-US"/>
               <a:t>Click to edit Master text styles</a:t>
             </a:r>
           </a:p>
           <a:p>
             <a:pPr lvl="1"/>
             <a:r>
-              <a:rPr lang="en-US" smtClean="0"/>
+              <a:rPr lang="en-US"/>
               <a:t>Second level</a:t>
             </a:r>
           </a:p>
           <a:p>
             <a:pPr lvl="2"/>
             <a:r>
-              <a:rPr lang="en-US" smtClean="0"/>
+              <a:rPr lang="en-US"/>
               <a:t>Third level</a:t>
             </a:r>
           </a:p>
           <a:p>
             <a:pPr lvl="3"/>
             <a:r>
-              <a:rPr lang="en-US" smtClean="0"/>
+              <a:rPr lang="en-US"/>
               <a:t>Fourth level</a:t>
             </a:r>
           </a:p>
           <a:p>
             <a:pPr lvl="4"/>
             <a:r>
-              <a:rPr lang="en-US" smtClean="0"/>
+              <a:rPr lang="en-US"/>
               <a:t>Fifth level</a:t>
             </a:r>
-            <a:endParaRPr lang="en-US"/>
           </a:p>
         </p:txBody>
       </p:sp>
@@ -1839,7 +1627,7 @@
           <a:p>
             <a:fld id="{5BCAD085-E8A6-8845-BD4E-CB4CCA059FC4}" type="datetimeFigureOut">
               <a:rPr lang="en-US" smtClean="0"/>
-              <a:t>1/27/13</a:t>
+              <a:t>5/6/26</a:t>
             </a:fld>
             <a:endParaRPr lang="en-US"/>
           </a:p>
@@ -1933,10 +1721,9 @@
           <a:lstStyle/>
           <a:p>
             <a:r>
-              <a:rPr lang="en-US" smtClean="0"/>
+              <a:rPr lang="en-US"/>
               <a:t>Click to edit Master title style</a:t>
             </a:r>
-            <a:endParaRPr lang="en-US"/>
           </a:p>
         </p:txBody>
       </p:sp>
@@ -1957,38 +1744,37 @@
           <a:p>
             <a:pPr lvl="0"/>
             <a:r>
-              <a:rPr lang="en-US" smtClean="0"/>
+              <a:rPr lang="en-US"/>
               <a:t>Click to edit Master text styles</a:t>
             </a:r>
           </a:p>
           <a:p>
             <a:pPr lvl="1"/>
             <a:r>
-              <a:rPr lang="en-US" smtClean="0"/>
+              <a:rPr lang="en-US"/>
               <a:t>Second level</a:t>
             </a:r>
           </a:p>
           <a:p>
             <a:pPr lvl="2"/>
             <a:r>
-              <a:rPr lang="en-US" smtClean="0"/>
+              <a:rPr lang="en-US"/>
               <a:t>Third level</a:t>
             </a:r>
           </a:p>
           <a:p>
             <a:pPr lvl="3"/>
             <a:r>
-              <a:rPr lang="en-US" smtClean="0"/>
+              <a:rPr lang="en-US"/>
               <a:t>Fourth level</a:t>
             </a:r>
           </a:p>
           <a:p>
             <a:pPr lvl="4"/>
             <a:r>
-              <a:rPr lang="en-US" smtClean="0"/>
+              <a:rPr lang="en-US"/>
               <a:t>Fifth level</a:t>
             </a:r>
-            <a:endParaRPr lang="en-US"/>
           </a:p>
         </p:txBody>
       </p:sp>
@@ -2009,7 +1795,7 @@
           <a:p>
             <a:fld id="{5BCAD085-E8A6-8845-BD4E-CB4CCA059FC4}" type="datetimeFigureOut">
               <a:rPr lang="en-US" smtClean="0"/>
-              <a:t>1/27/13</a:t>
+              <a:t>5/6/26</a:t>
             </a:fld>
             <a:endParaRPr lang="en-US"/>
           </a:p>
@@ -2112,10 +1898,9 @@
           </a:lstStyle>
           <a:p>
             <a:r>
-              <a:rPr lang="en-US" smtClean="0"/>
+              <a:rPr lang="en-US"/>
               <a:t>Click to edit Master title style</a:t>
             </a:r>
-            <a:endParaRPr lang="en-US"/>
           </a:p>
         </p:txBody>
       </p:sp>
@@ -2232,7 +2017,7 @@
           <a:p>
             <a:pPr lvl="0"/>
             <a:r>
-              <a:rPr lang="en-US" smtClean="0"/>
+              <a:rPr lang="en-US"/>
               <a:t>Click to edit Master text styles</a:t>
             </a:r>
           </a:p>
@@ -2255,7 +2040,7 @@
           <a:p>
             <a:fld id="{5BCAD085-E8A6-8845-BD4E-CB4CCA059FC4}" type="datetimeFigureOut">
               <a:rPr lang="en-US" smtClean="0"/>
-              <a:t>1/27/13</a:t>
+              <a:t>5/6/26</a:t>
             </a:fld>
             <a:endParaRPr lang="en-US"/>
           </a:p>
@@ -2349,10 +2134,9 @@
           <a:lstStyle/>
           <a:p>
             <a:r>
-              <a:rPr lang="en-US" smtClean="0"/>
+              <a:rPr lang="en-US"/>
               <a:t>Click to edit Master title style</a:t>
             </a:r>
-            <a:endParaRPr lang="en-US"/>
           </a:p>
         </p:txBody>
       </p:sp>
@@ -2406,38 +2190,37 @@
           <a:p>
             <a:pPr lvl="0"/>
             <a:r>
-              <a:rPr lang="en-US" smtClean="0"/>
+              <a:rPr lang="en-US"/>
               <a:t>Click to edit Master text styles</a:t>
             </a:r>
           </a:p>
           <a:p>
             <a:pPr lvl="1"/>
             <a:r>
-              <a:rPr lang="en-US" smtClean="0"/>
+              <a:rPr lang="en-US"/>
               <a:t>Second level</a:t>
             </a:r>
           </a:p>
           <a:p>
             <a:pPr lvl="2"/>
             <a:r>
-              <a:rPr lang="en-US" smtClean="0"/>
+              <a:rPr lang="en-US"/>
               <a:t>Third level</a:t>
             </a:r>
           </a:p>
           <a:p>
             <a:pPr lvl="3"/>
             <a:r>
-              <a:rPr lang="en-US" smtClean="0"/>
+              <a:rPr lang="en-US"/>
               <a:t>Fourth level</a:t>
             </a:r>
           </a:p>
           <a:p>
             <a:pPr lvl="4"/>
             <a:r>
-              <a:rPr lang="en-US" smtClean="0"/>
+              <a:rPr lang="en-US"/>
               <a:t>Fifth level</a:t>
             </a:r>
-            <a:endParaRPr lang="en-US"/>
           </a:p>
         </p:txBody>
       </p:sp>
@@ -2491,38 +2274,37 @@
           <a:p>
             <a:pPr lvl="0"/>
             <a:r>
-              <a:rPr lang="en-US" smtClean="0"/>
+              <a:rPr lang="en-US"/>
               <a:t>Click to edit Master text styles</a:t>
             </a:r>
           </a:p>
           <a:p>
             <a:pPr lvl="1"/>
             <a:r>
-              <a:rPr lang="en-US" smtClean="0"/>
+              <a:rPr lang="en-US"/>
               <a:t>Second level</a:t>
             </a:r>
           </a:p>
           <a:p>
             <a:pPr lvl="2"/>
             <a:r>
-              <a:rPr lang="en-US" smtClean="0"/>
+              <a:rPr lang="en-US"/>
               <a:t>Third level</a:t>
             </a:r>
           </a:p>
           <a:p>
             <a:pPr lvl="3"/>
             <a:r>
-              <a:rPr lang="en-US" smtClean="0"/>
+              <a:rPr lang="en-US"/>
               <a:t>Fourth level</a:t>
             </a:r>
           </a:p>
           <a:p>
             <a:pPr lvl="4"/>
             <a:r>
-              <a:rPr lang="en-US" smtClean="0"/>
+              <a:rPr lang="en-US"/>
               <a:t>Fifth level</a:t>
             </a:r>
-            <a:endParaRPr lang="en-US"/>
           </a:p>
         </p:txBody>
       </p:sp>
@@ -2543,7 +2325,7 @@
           <a:p>
             <a:fld id="{5BCAD085-E8A6-8845-BD4E-CB4CCA059FC4}" type="datetimeFigureOut">
               <a:rPr lang="en-US" smtClean="0"/>
-              <a:t>1/27/13</a:t>
+              <a:t>5/6/26</a:t>
             </a:fld>
             <a:endParaRPr lang="en-US"/>
           </a:p>
@@ -2641,10 +2423,9 @@
           </a:lstStyle>
           <a:p>
             <a:r>
-              <a:rPr lang="en-US" smtClean="0"/>
+              <a:rPr lang="en-US"/>
               <a:t>Click to edit Master title style</a:t>
             </a:r>
-            <a:endParaRPr lang="en-US"/>
           </a:p>
         </p:txBody>
       </p:sp>
@@ -2707,7 +2488,7 @@
           <a:p>
             <a:pPr lvl="0"/>
             <a:r>
-              <a:rPr lang="en-US" smtClean="0"/>
+              <a:rPr lang="en-US"/>
               <a:t>Click to edit Master text styles</a:t>
             </a:r>
           </a:p>
@@ -2763,38 +2544,37 @@
           <a:p>
             <a:pPr lvl="0"/>
             <a:r>
-              <a:rPr lang="en-US" smtClean="0"/>
+              <a:rPr lang="en-US"/>
               <a:t>Click to edit Master text styles</a:t>
             </a:r>
           </a:p>
           <a:p>
             <a:pPr lvl="1"/>
             <a:r>
-              <a:rPr lang="en-US" smtClean="0"/>
+              <a:rPr lang="en-US"/>
               <a:t>Second level</a:t>
             </a:r>
           </a:p>
           <a:p>
             <a:pPr lvl="2"/>
             <a:r>
-              <a:rPr lang="en-US" smtClean="0"/>
+              <a:rPr lang="en-US"/>
               <a:t>Third level</a:t>
             </a:r>
           </a:p>
           <a:p>
             <a:pPr lvl="3"/>
             <a:r>
-              <a:rPr lang="en-US" smtClean="0"/>
+              <a:rPr lang="en-US"/>
               <a:t>Fourth level</a:t>
             </a:r>
           </a:p>
           <a:p>
             <a:pPr lvl="4"/>
             <a:r>
-              <a:rPr lang="en-US" smtClean="0"/>
+              <a:rPr lang="en-US"/>
               <a:t>Fifth level</a:t>
             </a:r>
-            <a:endParaRPr lang="en-US"/>
           </a:p>
         </p:txBody>
       </p:sp>
@@ -2857,7 +2637,7 @@
           <a:p>
             <a:pPr lvl="0"/>
             <a:r>
-              <a:rPr lang="en-US" smtClean="0"/>
+              <a:rPr lang="en-US"/>
               <a:t>Click to edit Master text styles</a:t>
             </a:r>
           </a:p>
@@ -2913,38 +2693,37 @@
           <a:p>
             <a:pPr lvl="0"/>
             <a:r>
-              <a:rPr lang="en-US" smtClean="0"/>
+              <a:rPr lang="en-US"/>
               <a:t>Click to edit Master text styles</a:t>
             </a:r>
           </a:p>
           <a:p>
             <a:pPr lvl="1"/>
             <a:r>
-              <a:rPr lang="en-US" smtClean="0"/>
+              <a:rPr lang="en-US"/>
               <a:t>Second level</a:t>
             </a:r>
           </a:p>
           <a:p>
             <a:pPr lvl="2"/>
             <a:r>
-              <a:rPr lang="en-US" smtClean="0"/>
+              <a:rPr lang="en-US"/>
               <a:t>Third level</a:t>
             </a:r>
           </a:p>
           <a:p>
             <a:pPr lvl="3"/>
             <a:r>
-              <a:rPr lang="en-US" smtClean="0"/>
+              <a:rPr lang="en-US"/>
               <a:t>Fourth level</a:t>
             </a:r>
           </a:p>
           <a:p>
             <a:pPr lvl="4"/>
             <a:r>
-              <a:rPr lang="en-US" smtClean="0"/>
+              <a:rPr lang="en-US"/>
               <a:t>Fifth level</a:t>
             </a:r>
-            <a:endParaRPr lang="en-US"/>
           </a:p>
         </p:txBody>
       </p:sp>
@@ -2965,7 +2744,7 @@
           <a:p>
             <a:fld id="{5BCAD085-E8A6-8845-BD4E-CB4CCA059FC4}" type="datetimeFigureOut">
               <a:rPr lang="en-US" smtClean="0"/>
-              <a:t>1/27/13</a:t>
+              <a:t>5/6/26</a:t>
             </a:fld>
             <a:endParaRPr lang="en-US"/>
           </a:p>
@@ -3059,10 +2838,9 @@
           <a:lstStyle/>
           <a:p>
             <a:r>
-              <a:rPr lang="en-US" smtClean="0"/>
+              <a:rPr lang="en-US"/>
               <a:t>Click to edit Master title style</a:t>
             </a:r>
-            <a:endParaRPr lang="en-US"/>
           </a:p>
         </p:txBody>
       </p:sp>
@@ -3083,7 +2861,7 @@
           <a:p>
             <a:fld id="{5BCAD085-E8A6-8845-BD4E-CB4CCA059FC4}" type="datetimeFigureOut">
               <a:rPr lang="en-US" smtClean="0"/>
-              <a:t>1/27/13</a:t>
+              <a:t>5/6/26</a:t>
             </a:fld>
             <a:endParaRPr lang="en-US"/>
           </a:p>
@@ -3178,7 +2956,7 @@
           <a:p>
             <a:fld id="{5BCAD085-E8A6-8845-BD4E-CB4CCA059FC4}" type="datetimeFigureOut">
               <a:rPr lang="en-US" smtClean="0"/>
-              <a:t>1/27/13</a:t>
+              <a:t>5/6/26</a:t>
             </a:fld>
             <a:endParaRPr lang="en-US"/>
           </a:p>
@@ -3281,10 +3059,9 @@
           </a:lstStyle>
           <a:p>
             <a:r>
-              <a:rPr lang="en-US" smtClean="0"/>
+              <a:rPr lang="en-US"/>
               <a:t>Click to edit Master title style</a:t>
             </a:r>
-            <a:endParaRPr lang="en-US"/>
           </a:p>
         </p:txBody>
       </p:sp>
@@ -3338,38 +3115,37 @@
           <a:p>
             <a:pPr lvl="0"/>
             <a:r>
-              <a:rPr lang="en-US" smtClean="0"/>
+              <a:rPr lang="en-US"/>
               <a:t>Click to edit Master text styles</a:t>
             </a:r>
           </a:p>
           <a:p>
             <a:pPr lvl="1"/>
             <a:r>
-              <a:rPr lang="en-US" smtClean="0"/>
+              <a:rPr lang="en-US"/>
               <a:t>Second level</a:t>
             </a:r>
           </a:p>
           <a:p>
             <a:pPr lvl="2"/>
             <a:r>
-              <a:rPr lang="en-US" smtClean="0"/>
+              <a:rPr lang="en-US"/>
               <a:t>Third level</a:t>
             </a:r>
           </a:p>
           <a:p>
             <a:pPr lvl="3"/>
             <a:r>
-              <a:rPr lang="en-US" smtClean="0"/>
+              <a:rPr lang="en-US"/>
               <a:t>Fourth level</a:t>
             </a:r>
           </a:p>
           <a:p>
             <a:pPr lvl="4"/>
             <a:r>
-              <a:rPr lang="en-US" smtClean="0"/>
+              <a:rPr lang="en-US"/>
               <a:t>Fifth level</a:t>
             </a:r>
-            <a:endParaRPr lang="en-US"/>
           </a:p>
         </p:txBody>
       </p:sp>
@@ -3432,7 +3208,7 @@
           <a:p>
             <a:pPr lvl="0"/>
             <a:r>
-              <a:rPr lang="en-US" smtClean="0"/>
+              <a:rPr lang="en-US"/>
               <a:t>Click to edit Master text styles</a:t>
             </a:r>
           </a:p>
@@ -3455,7 +3231,7 @@
           <a:p>
             <a:fld id="{5BCAD085-E8A6-8845-BD4E-CB4CCA059FC4}" type="datetimeFigureOut">
               <a:rPr lang="en-US" smtClean="0"/>
-              <a:t>1/27/13</a:t>
+              <a:t>5/6/26</a:t>
             </a:fld>
             <a:endParaRPr lang="en-US"/>
           </a:p>
@@ -3558,10 +3334,9 @@
           </a:lstStyle>
           <a:p>
             <a:r>
-              <a:rPr lang="en-US" smtClean="0"/>
+              <a:rPr lang="en-US"/>
               <a:t>Click to edit Master title style</a:t>
             </a:r>
-            <a:endParaRPr lang="en-US"/>
           </a:p>
         </p:txBody>
       </p:sp>
@@ -3685,7 +3460,7 @@
           <a:p>
             <a:pPr lvl="0"/>
             <a:r>
-              <a:rPr lang="en-US" smtClean="0"/>
+              <a:rPr lang="en-US"/>
               <a:t>Click to edit Master text styles</a:t>
             </a:r>
           </a:p>
@@ -3708,7 +3483,7 @@
           <a:p>
             <a:fld id="{5BCAD085-E8A6-8845-BD4E-CB4CCA059FC4}" type="datetimeFigureOut">
               <a:rPr lang="en-US" smtClean="0"/>
-              <a:t>1/27/13</a:t>
+              <a:t>5/6/26</a:t>
             </a:fld>
             <a:endParaRPr lang="en-US"/>
           </a:p>
@@ -3817,10 +3592,9 @@
           <a:lstStyle/>
           <a:p>
             <a:r>
-              <a:rPr lang="en-US" smtClean="0"/>
+              <a:rPr lang="en-US"/>
               <a:t>Click to edit Master title style</a:t>
             </a:r>
-            <a:endParaRPr lang="en-US"/>
           </a:p>
         </p:txBody>
       </p:sp>
@@ -3851,38 +3625,37 @@
           <a:p>
             <a:pPr lvl="0"/>
             <a:r>
-              <a:rPr lang="en-US" smtClean="0"/>
+              <a:rPr lang="en-US"/>
               <a:t>Click to edit Master text styles</a:t>
             </a:r>
           </a:p>
           <a:p>
             <a:pPr lvl="1"/>
             <a:r>
-              <a:rPr lang="en-US" smtClean="0"/>
+              <a:rPr lang="en-US"/>
               <a:t>Second level</a:t>
             </a:r>
           </a:p>
           <a:p>
             <a:pPr lvl="2"/>
             <a:r>
-              <a:rPr lang="en-US" smtClean="0"/>
+              <a:rPr lang="en-US"/>
               <a:t>Third level</a:t>
             </a:r>
           </a:p>
           <a:p>
             <a:pPr lvl="3"/>
             <a:r>
-              <a:rPr lang="en-US" smtClean="0"/>
+              <a:rPr lang="en-US"/>
               <a:t>Fourth level</a:t>
             </a:r>
           </a:p>
           <a:p>
             <a:pPr lvl="4"/>
             <a:r>
-              <a:rPr lang="en-US" smtClean="0"/>
+              <a:rPr lang="en-US"/>
               <a:t>Fifth level</a:t>
             </a:r>
-            <a:endParaRPr lang="en-US"/>
           </a:p>
         </p:txBody>
       </p:sp>
@@ -3921,7 +3694,7 @@
           <a:p>
             <a:fld id="{5BCAD085-E8A6-8845-BD4E-CB4CCA059FC4}" type="datetimeFigureOut">
               <a:rPr lang="en-US" smtClean="0"/>
-              <a:t>1/27/13</a:t>
+              <a:t>5/6/26</a:t>
             </a:fld>
             <a:endParaRPr lang="en-US"/>
           </a:p>
@@ -4280,7 +4053,7 @@
 </file>
 
 <file path=ppt/slides/slide1.xml><?xml version="1.0" encoding="utf-8"?>
-<p:sld xmlns:a="http://schemas.openxmlformats.org/drawingml/2006/main" xmlns:p="http://schemas.openxmlformats.org/presentationml/2006/main" xmlns:r="http://schemas.openxmlformats.org/officeDocument/2006/relationships">
+<p:sld xmlns:a="http://schemas.openxmlformats.org/drawingml/2006/main" xmlns:r="http://schemas.openxmlformats.org/officeDocument/2006/relationships" xmlns:p="http://schemas.openxmlformats.org/presentationml/2006/main">
   <p:cSld>
     <p:spTree>
       <p:nvGrpSpPr>
@@ -4288,7 +4061,14 @@
         <p:cNvGrpSpPr/>
         <p:nvPr/>
       </p:nvGrpSpPr>
-      <p:grpSpPr/>
+      <p:grpSpPr>
+        <a:xfrm>
+          <a:off x="0" y="0"/>
+          <a:ext cx="0" cy="0"/>
+          <a:chOff x="0" y="0"/>
+          <a:chExt cx="0" cy="0"/>
+        </a:xfrm>
+      </p:grpSpPr>
       <p:sp>
         <p:nvSpPr>
           <p:cNvPr id="2" name="Rectangle 1"/>
@@ -4330,105 +4110,20 @@
           <a:lstStyle/>
           <a:p>
             <a:pPr algn="ctr"/>
-          </a:p>
-        </p:txBody>
-      </p:sp>
-      <p:sp>
-        <p:nvSpPr>
-          <p:cNvPr id="3" name="Rectangle 2"/>
-          <p:cNvSpPr/>
-          <p:nvPr/>
-        </p:nvSpPr>
-        <p:spPr>
-          <a:xfrm>
-            <a:off x="12070080" y="0"/>
-            <a:ext cx="6217920" cy="10287000"/>
-          </a:xfrm>
-          <a:prstGeom prst="rect">
-            <a:avLst/>
-          </a:prstGeom>
-          <a:solidFill>
-            <a:srgbClr val="1A1D24"/>
-          </a:solidFill>
-          <a:ln>
-            <a:noFill/>
-          </a:ln>
-        </p:spPr>
-        <p:style>
-          <a:lnRef idx="1">
-            <a:schemeClr val="accent1"/>
-          </a:lnRef>
-          <a:fillRef idx="3">
-            <a:schemeClr val="accent1"/>
-          </a:fillRef>
-          <a:effectRef idx="2">
-            <a:schemeClr val="accent1"/>
-          </a:effectRef>
-          <a:fontRef idx="minor">
-            <a:schemeClr val="lt1"/>
-          </a:fontRef>
-        </p:style>
-        <p:txBody>
-          <a:bodyPr rtlCol="0" anchor="ctr"/>
-          <a:lstStyle/>
-          <a:p>
-            <a:pPr algn="ctr"/>
-          </a:p>
-        </p:txBody>
-      </p:sp>
-      <p:sp>
-        <p:nvSpPr>
-          <p:cNvPr id="4" name="Rectangle 3"/>
-          <p:cNvSpPr/>
-          <p:nvPr/>
-        </p:nvSpPr>
-        <p:spPr>
-          <a:xfrm>
-            <a:off x="12070080" y="0"/>
-            <a:ext cx="164592" cy="10287000"/>
-          </a:xfrm>
-          <a:prstGeom prst="rect">
-            <a:avLst/>
-          </a:prstGeom>
-          <a:solidFill>
-            <a:srgbClr val="3FE0D0"/>
-          </a:solidFill>
-          <a:ln>
-            <a:noFill/>
-          </a:ln>
-        </p:spPr>
-        <p:style>
-          <a:lnRef idx="1">
-            <a:schemeClr val="accent1"/>
-          </a:lnRef>
-          <a:fillRef idx="3">
-            <a:schemeClr val="accent1"/>
-          </a:fillRef>
-          <a:effectRef idx="2">
-            <a:schemeClr val="accent1"/>
-          </a:effectRef>
-          <a:fontRef idx="minor">
-            <a:schemeClr val="lt1"/>
-          </a:fontRef>
-        </p:style>
-        <p:txBody>
-          <a:bodyPr rtlCol="0" anchor="ctr"/>
-          <a:lstStyle/>
-          <a:p>
-            <a:pPr algn="ctr"/>
-          </a:p>
-        </p:txBody>
-      </p:sp>
-      <p:sp>
-        <p:nvSpPr>
-          <p:cNvPr id="5" name="TextBox 4"/>
+            <a:endParaRPr/>
+          </a:p>
+        </p:txBody>
+      </p:sp>
+      <p:sp>
+        <p:nvSpPr>
+          <p:cNvPr id="6" name="TextBox 5"/>
           <p:cNvSpPr txBox="1"/>
           <p:nvPr/>
         </p:nvSpPr>
         <p:spPr>
           <a:xfrm>
-            <a:off x="12527280" y="2194560"/>
-            <a:ext cx="5943600" cy="5486400"/>
+            <a:off x="950976" y="758952"/>
+            <a:ext cx="1828800" cy="365760"/>
           </a:xfrm>
           <a:prstGeom prst="rect">
             <a:avLst/>
@@ -4436,38 +4131,56 @@
           <a:noFill/>
         </p:spPr>
         <p:txBody>
-          <a:bodyPr wrap="square" lIns="0" rIns="0" tIns="0" bIns="0" anchor="t">
+          <a:bodyPr wrap="square" lIns="0" tIns="0" rIns="0" bIns="0" anchor="t">
             <a:spAutoFit/>
           </a:bodyPr>
           <a:lstStyle/>
           <a:p>
-            <a:pPr algn="ctr">
+            <a:pPr algn="l">
               <a:lnSpc>
                 <a:spcPct val="110000"/>
               </a:lnSpc>
             </a:pPr>
             <a:r>
-              <a:rPr sz="52000" b="1">
-                <a:solidFill>
-                  <a:srgbClr val="22262E"/>
+              <a:rPr sz="1950" b="1">
+                <a:solidFill>
+                  <a:srgbClr val="FFFFFF"/>
                 </a:solidFill>
                 <a:latin typeface="Montserrat"/>
               </a:rPr>
-              <a:t>05</a:t>
-            </a:r>
-          </a:p>
-        </p:txBody>
-      </p:sp>
-      <p:sp>
-        <p:nvSpPr>
-          <p:cNvPr id="6" name="TextBox 5"/>
+              <a:t>CITN</a:t>
+            </a:r>
+            <a:r>
+              <a:rPr sz="1950" b="1">
+                <a:solidFill>
+                  <a:srgbClr val="3FE0D0"/>
+                </a:solidFill>
+                <a:latin typeface="Montserrat"/>
+              </a:rPr>
+              <a:t>·</a:t>
+            </a:r>
+            <a:r>
+              <a:rPr sz="1950" b="1">
+                <a:solidFill>
+                  <a:srgbClr val="FFFFFF"/>
+                </a:solidFill>
+                <a:latin typeface="Montserrat"/>
+              </a:rPr>
+              <a:t>AI</a:t>
+            </a:r>
+          </a:p>
+        </p:txBody>
+      </p:sp>
+      <p:sp>
+        <p:nvSpPr>
+          <p:cNvPr id="7" name="TextBox 6"/>
           <p:cNvSpPr txBox="1"/>
           <p:nvPr/>
         </p:nvSpPr>
         <p:spPr>
           <a:xfrm>
-            <a:off x="950976" y="758952"/>
-            <a:ext cx="1828800" cy="365760"/>
+            <a:off x="950976" y="3246120"/>
+            <a:ext cx="10972800" cy="365760"/>
           </a:xfrm>
           <a:prstGeom prst="rect">
             <a:avLst/>
@@ -4475,7 +4188,7 @@
           <a:noFill/>
         </p:spPr>
         <p:txBody>
-          <a:bodyPr wrap="square" lIns="0" rIns="0" tIns="0" bIns="0" anchor="t">
+          <a:bodyPr wrap="square" lIns="0" tIns="0" rIns="0" bIns="0" anchor="t">
             <a:spAutoFit/>
           </a:bodyPr>
           <a:lstStyle/>
@@ -4488,43 +4201,25 @@
             <a:r>
               <a:rPr sz="1950" b="1">
                 <a:solidFill>
-                  <a:srgbClr val="FFFFFF"/>
+                  <a:srgbClr val="3FE0D0"/>
                 </a:solidFill>
                 <a:latin typeface="Montserrat"/>
               </a:rPr>
-              <a:t>CITN</a:t>
-            </a:r>
-            <a:r>
-              <a:rPr sz="1950" b="1">
-                <a:solidFill>
-                  <a:srgbClr val="3FE0D0"/>
-                </a:solidFill>
-                <a:latin typeface="Montserrat"/>
-              </a:rPr>
-              <a:t>·</a:t>
-            </a:r>
-            <a:r>
-              <a:rPr sz="1950" b="1">
-                <a:solidFill>
-                  <a:srgbClr val="FFFFFF"/>
-                </a:solidFill>
-                <a:latin typeface="Montserrat"/>
-              </a:rPr>
-              <a:t>AI</a:t>
-            </a:r>
-          </a:p>
-        </p:txBody>
-      </p:sp>
-      <p:sp>
-        <p:nvSpPr>
-          <p:cNvPr id="7" name="TextBox 6"/>
+              <a:t>CHURCH IT NETWORK · WORKSHOP</a:t>
+            </a:r>
+          </a:p>
+        </p:txBody>
+      </p:sp>
+      <p:sp>
+        <p:nvSpPr>
+          <p:cNvPr id="8" name="TextBox 7"/>
           <p:cNvSpPr txBox="1"/>
           <p:nvPr/>
         </p:nvSpPr>
         <p:spPr>
           <a:xfrm>
-            <a:off x="950976" y="3246120"/>
-            <a:ext cx="10972800" cy="365760"/>
+            <a:off x="950976" y="3703320"/>
+            <a:ext cx="7315200" cy="365760"/>
           </a:xfrm>
           <a:prstGeom prst="rect">
             <a:avLst/>
@@ -4532,7 +4227,7 @@
           <a:noFill/>
         </p:spPr>
         <p:txBody>
-          <a:bodyPr wrap="square" lIns="0" rIns="0" tIns="0" bIns="0" anchor="t">
+          <a:bodyPr wrap="square" lIns="0" tIns="0" rIns="0" bIns="0" anchor="t">
             <a:spAutoFit/>
           </a:bodyPr>
           <a:lstStyle/>
@@ -4543,27 +4238,27 @@
               </a:lnSpc>
             </a:pPr>
             <a:r>
-              <a:rPr sz="1950" b="1">
+              <a:rPr sz="2100" b="0">
                 <a:solidFill>
                   <a:srgbClr val="3FE0D0"/>
                 </a:solidFill>
-                <a:latin typeface="Montserrat"/>
-              </a:rPr>
-              <a:t>CHURCH IT NETWORK · WORKSHOP</a:t>
-            </a:r>
-          </a:p>
-        </p:txBody>
-      </p:sp>
-      <p:sp>
-        <p:nvSpPr>
-          <p:cNvPr id="8" name="TextBox 7"/>
+                <a:latin typeface="JetBrains Mono"/>
+              </a:rPr>
+              <a:t>PART 05 / 14</a:t>
+            </a:r>
+          </a:p>
+        </p:txBody>
+      </p:sp>
+      <p:sp>
+        <p:nvSpPr>
+          <p:cNvPr id="9" name="TextBox 8"/>
           <p:cNvSpPr txBox="1"/>
           <p:nvPr/>
         </p:nvSpPr>
         <p:spPr>
           <a:xfrm>
-            <a:off x="950976" y="3703320"/>
-            <a:ext cx="7315200" cy="365760"/>
+            <a:off x="950976" y="4160520"/>
+            <a:ext cx="14272982" cy="3113160"/>
           </a:xfrm>
           <a:prstGeom prst="rect">
             <a:avLst/>
@@ -4571,38 +4266,56 @@
           <a:noFill/>
         </p:spPr>
         <p:txBody>
-          <a:bodyPr wrap="square" lIns="0" rIns="0" tIns="0" bIns="0" anchor="t">
+          <a:bodyPr wrap="square" lIns="0" tIns="0" rIns="0" bIns="0" anchor="t">
             <a:spAutoFit/>
           </a:bodyPr>
           <a:lstStyle/>
           <a:p>
             <a:pPr algn="l">
               <a:lnSpc>
-                <a:spcPct val="110000"/>
-              </a:lnSpc>
-            </a:pPr>
-            <a:r>
-              <a:rPr sz="2100" b="0">
+                <a:spcPct val="105000"/>
+              </a:lnSpc>
+            </a:pPr>
+            <a:r>
+              <a:rPr sz="9900" b="1" dirty="0">
+                <a:solidFill>
+                  <a:srgbClr val="FFFFFF"/>
+                </a:solidFill>
+                <a:latin typeface="Montserrat"/>
+              </a:rPr>
+              <a:t>Building </a:t>
+            </a:r>
+            <a:r>
+              <a:rPr sz="9900" b="1" dirty="0">
                 <a:solidFill>
                   <a:srgbClr val="3FE0D0"/>
                 </a:solidFill>
-                <a:latin typeface="JetBrains Mono"/>
-              </a:rPr>
-              <a:t>PART 05 / 14</a:t>
-            </a:r>
-          </a:p>
-        </p:txBody>
-      </p:sp>
-      <p:sp>
-        <p:nvSpPr>
-          <p:cNvPr id="9" name="TextBox 8"/>
+                <a:latin typeface="Montserrat"/>
+              </a:rPr>
+              <a:t>Context</a:t>
+            </a:r>
+            <a:r>
+              <a:rPr sz="9900" b="1" dirty="0">
+                <a:solidFill>
+                  <a:srgbClr val="FFFFFF"/>
+                </a:solidFill>
+                <a:latin typeface="Montserrat"/>
+              </a:rPr>
+              <a:t> Part 2</a:t>
+            </a:r>
+          </a:p>
+        </p:txBody>
+      </p:sp>
+      <p:sp>
+        <p:nvSpPr>
+          <p:cNvPr id="10" name="TextBox 9"/>
           <p:cNvSpPr txBox="1"/>
           <p:nvPr/>
         </p:nvSpPr>
         <p:spPr>
           <a:xfrm>
-            <a:off x="950976" y="4160520"/>
-            <a:ext cx="10972800" cy="2468880"/>
+            <a:off x="950976" y="7150236"/>
+            <a:ext cx="10972800" cy="640080"/>
           </a:xfrm>
           <a:prstGeom prst="rect">
             <a:avLst/>
@@ -4610,280 +4323,24 @@
           <a:noFill/>
         </p:spPr>
         <p:txBody>
-          <a:bodyPr wrap="square" lIns="0" rIns="0" tIns="0" bIns="0" anchor="t">
+          <a:bodyPr wrap="square" lIns="0" tIns="0" rIns="0" bIns="0" anchor="t">
             <a:spAutoFit/>
           </a:bodyPr>
           <a:lstStyle/>
           <a:p>
             <a:pPr algn="l">
               <a:lnSpc>
-                <a:spcPct val="105000"/>
-              </a:lnSpc>
-            </a:pPr>
-            <a:r>
-              <a:rPr sz="9900" b="1">
-                <a:solidFill>
-                  <a:srgbClr val="FFFFFF"/>
-                </a:solidFill>
-                <a:latin typeface="Montserrat"/>
-              </a:rPr>
-              <a:t>Building </a:t>
-            </a:r>
-            <a:r>
-              <a:rPr sz="9900" b="1">
-                <a:solidFill>
-                  <a:srgbClr val="3FE0D0"/>
-                </a:solidFill>
-                <a:latin typeface="Montserrat"/>
-              </a:rPr>
-              <a:t>Context</a:t>
-            </a:r>
-            <a:r>
-              <a:rPr sz="9900" b="1">
-                <a:solidFill>
-                  <a:srgbClr val="FFFFFF"/>
-                </a:solidFill>
-                <a:latin typeface="Montserrat"/>
-              </a:rPr>
-              <a:t> — Part 2</a:t>
-            </a:r>
-          </a:p>
-        </p:txBody>
-      </p:sp>
-      <p:sp>
-        <p:nvSpPr>
-          <p:cNvPr id="10" name="TextBox 9"/>
-          <p:cNvSpPr txBox="1"/>
-          <p:nvPr/>
-        </p:nvSpPr>
-        <p:spPr>
-          <a:xfrm>
-            <a:off x="950976" y="6720840"/>
-            <a:ext cx="10972800" cy="640080"/>
-          </a:xfrm>
-          <a:prstGeom prst="rect">
-            <a:avLst/>
-          </a:prstGeom>
-          <a:noFill/>
-        </p:spPr>
-        <p:txBody>
-          <a:bodyPr wrap="square" lIns="0" rIns="0" tIns="0" bIns="0" anchor="t">
-            <a:spAutoFit/>
-          </a:bodyPr>
-          <a:lstStyle/>
-          <a:p>
-            <a:pPr algn="l">
-              <a:lnSpc>
                 <a:spcPct val="110000"/>
               </a:lnSpc>
             </a:pPr>
             <a:r>
-              <a:rPr sz="2400" b="0">
+              <a:rPr sz="2400" b="0" dirty="0">
                 <a:solidFill>
                   <a:srgbClr val="C9CBD1"/>
                 </a:solidFill>
                 <a:latin typeface="Inter"/>
               </a:rPr>
               <a:t>Everyone writes. Everyone rewrites. — Commandment X in practice</a:t>
-            </a:r>
-          </a:p>
-        </p:txBody>
-      </p:sp>
-      <p:sp>
-        <p:nvSpPr>
-          <p:cNvPr id="11" name="Rectangle 10"/>
-          <p:cNvSpPr/>
-          <p:nvPr/>
-        </p:nvSpPr>
-        <p:spPr>
-          <a:xfrm>
-            <a:off x="950976" y="8247888"/>
-            <a:ext cx="548640" cy="38100"/>
-          </a:xfrm>
-          <a:prstGeom prst="rect">
-            <a:avLst/>
-          </a:prstGeom>
-          <a:solidFill>
-            <a:srgbClr val="F58220"/>
-          </a:solidFill>
-          <a:ln>
-            <a:noFill/>
-          </a:ln>
-        </p:spPr>
-        <p:style>
-          <a:lnRef idx="1">
-            <a:schemeClr val="accent1"/>
-          </a:lnRef>
-          <a:fillRef idx="3">
-            <a:schemeClr val="accent1"/>
-          </a:fillRef>
-          <a:effectRef idx="2">
-            <a:schemeClr val="accent1"/>
-          </a:effectRef>
-          <a:fontRef idx="minor">
-            <a:schemeClr val="lt1"/>
-          </a:fontRef>
-        </p:style>
-        <p:txBody>
-          <a:bodyPr rtlCol="0" anchor="ctr"/>
-          <a:lstStyle/>
-          <a:p>
-            <a:pPr algn="ctr"/>
-          </a:p>
-        </p:txBody>
-      </p:sp>
-      <p:sp>
-        <p:nvSpPr>
-          <p:cNvPr id="12" name="TextBox 11"/>
-          <p:cNvSpPr txBox="1"/>
-          <p:nvPr/>
-        </p:nvSpPr>
-        <p:spPr>
-          <a:xfrm>
-            <a:off x="950976" y="8394192"/>
-            <a:ext cx="7315200" cy="365760"/>
-          </a:xfrm>
-          <a:prstGeom prst="rect">
-            <a:avLst/>
-          </a:prstGeom>
-          <a:noFill/>
-        </p:spPr>
-        <p:txBody>
-          <a:bodyPr wrap="square" lIns="0" rIns="0" tIns="0" bIns="0" anchor="t">
-            <a:spAutoFit/>
-          </a:bodyPr>
-          <a:lstStyle/>
-          <a:p>
-            <a:pPr algn="l">
-              <a:lnSpc>
-                <a:spcPct val="110000"/>
-              </a:lnSpc>
-            </a:pPr>
-            <a:r>
-              <a:rPr sz="1400" b="0">
-                <a:solidFill>
-                  <a:srgbClr val="F58220"/>
-                </a:solidFill>
-                <a:latin typeface="JetBrains Mono"/>
-              </a:rPr>
-              <a:t>SPEAKER</a:t>
-            </a:r>
-          </a:p>
-        </p:txBody>
-      </p:sp>
-      <p:sp>
-        <p:nvSpPr>
-          <p:cNvPr id="13" name="TextBox 12"/>
-          <p:cNvSpPr txBox="1"/>
-          <p:nvPr/>
-        </p:nvSpPr>
-        <p:spPr>
-          <a:xfrm>
-            <a:off x="950976" y="8796528"/>
-            <a:ext cx="7315200" cy="457200"/>
-          </a:xfrm>
-          <a:prstGeom prst="rect">
-            <a:avLst/>
-          </a:prstGeom>
-          <a:noFill/>
-        </p:spPr>
-        <p:txBody>
-          <a:bodyPr wrap="square" lIns="0" rIns="0" tIns="0" bIns="0" anchor="t">
-            <a:spAutoFit/>
-          </a:bodyPr>
-          <a:lstStyle/>
-          <a:p>
-            <a:pPr algn="l">
-              <a:lnSpc>
-                <a:spcPct val="110000"/>
-              </a:lnSpc>
-            </a:pPr>
-            <a:r>
-              <a:rPr sz="2800" b="1">
-                <a:solidFill>
-                  <a:srgbClr val="FFFFFF"/>
-                </a:solidFill>
-                <a:latin typeface="Montserrat"/>
-              </a:rPr>
-              <a:t>Chris Kehayias</a:t>
-            </a:r>
-          </a:p>
-        </p:txBody>
-      </p:sp>
-      <p:sp>
-        <p:nvSpPr>
-          <p:cNvPr id="14" name="TextBox 13"/>
-          <p:cNvSpPr txBox="1"/>
-          <p:nvPr/>
-        </p:nvSpPr>
-        <p:spPr>
-          <a:xfrm>
-            <a:off x="7315200" y="8394192"/>
-            <a:ext cx="6400800" cy="365760"/>
-          </a:xfrm>
-          <a:prstGeom prst="rect">
-            <a:avLst/>
-          </a:prstGeom>
-          <a:noFill/>
-        </p:spPr>
-        <p:txBody>
-          <a:bodyPr wrap="square" lIns="0" rIns="0" tIns="0" bIns="0" anchor="t">
-            <a:spAutoFit/>
-          </a:bodyPr>
-          <a:lstStyle/>
-          <a:p>
-            <a:pPr algn="l">
-              <a:lnSpc>
-                <a:spcPct val="110000"/>
-              </a:lnSpc>
-            </a:pPr>
-            <a:r>
-              <a:rPr sz="1400" b="0">
-                <a:solidFill>
-                  <a:srgbClr val="F58220"/>
-                </a:solidFill>
-                <a:latin typeface="JetBrains Mono"/>
-              </a:rPr>
-              <a:t>WHEN</a:t>
-            </a:r>
-          </a:p>
-        </p:txBody>
-      </p:sp>
-      <p:sp>
-        <p:nvSpPr>
-          <p:cNvPr id="15" name="TextBox 14"/>
-          <p:cNvSpPr txBox="1"/>
-          <p:nvPr/>
-        </p:nvSpPr>
-        <p:spPr>
-          <a:xfrm>
-            <a:off x="7315200" y="8796528"/>
-            <a:ext cx="7315200" cy="457200"/>
-          </a:xfrm>
-          <a:prstGeom prst="rect">
-            <a:avLst/>
-          </a:prstGeom>
-          <a:noFill/>
-        </p:spPr>
-        <p:txBody>
-          <a:bodyPr wrap="square" lIns="0" rIns="0" tIns="0" bIns="0" anchor="t">
-            <a:spAutoFit/>
-          </a:bodyPr>
-          <a:lstStyle/>
-          <a:p>
-            <a:pPr algn="l">
-              <a:lnSpc>
-                <a:spcPct val="110000"/>
-              </a:lnSpc>
-            </a:pPr>
-            <a:r>
-              <a:rPr sz="2800" b="1">
-                <a:solidFill>
-                  <a:srgbClr val="FFFFFF"/>
-                </a:solidFill>
-                <a:latin typeface="Montserrat"/>
-              </a:rPr>
-              <a:t>Day 1 · 1:45 – 2:45 PM · 60 min</a:t>
             </a:r>
           </a:p>
         </p:txBody>
@@ -4897,7 +4354,7 @@
 </file>
 
 <file path=ppt/slides/slide10.xml><?xml version="1.0" encoding="utf-8"?>
-<p:sld xmlns:a="http://schemas.openxmlformats.org/drawingml/2006/main" xmlns:p="http://schemas.openxmlformats.org/presentationml/2006/main" xmlns:r="http://schemas.openxmlformats.org/officeDocument/2006/relationships">
+<p:sld xmlns:a="http://schemas.openxmlformats.org/drawingml/2006/main" xmlns:r="http://schemas.openxmlformats.org/officeDocument/2006/relationships" xmlns:p="http://schemas.openxmlformats.org/presentationml/2006/main">
   <p:cSld>
     <p:spTree>
       <p:nvGrpSpPr>
@@ -4905,7 +4362,14 @@
         <p:cNvGrpSpPr/>
         <p:nvPr/>
       </p:nvGrpSpPr>
-      <p:grpSpPr/>
+      <p:grpSpPr>
+        <a:xfrm>
+          <a:off x="0" y="0"/>
+          <a:ext cx="0" cy="0"/>
+          <a:chOff x="0" y="0"/>
+          <a:chExt cx="0" cy="0"/>
+        </a:xfrm>
+      </p:grpSpPr>
       <p:sp>
         <p:nvSpPr>
           <p:cNvPr id="2" name="Rectangle 1"/>
@@ -4947,6 +4411,7 @@
           <a:lstStyle/>
           <a:p>
             <a:pPr algn="ctr"/>
+            <a:endParaRPr/>
           </a:p>
         </p:txBody>
       </p:sp>
@@ -4967,7 +4432,7 @@
           <a:noFill/>
         </p:spPr>
         <p:txBody>
-          <a:bodyPr wrap="square" lIns="0" rIns="0" tIns="0" bIns="0" anchor="t">
+          <a:bodyPr wrap="square" lIns="0" tIns="0" rIns="0" bIns="0" anchor="t">
             <a:spAutoFit/>
           </a:bodyPr>
           <a:lstStyle/>
@@ -5006,7 +4471,7 @@
           <a:noFill/>
         </p:spPr>
         <p:txBody>
-          <a:bodyPr wrap="square" lIns="0" rIns="0" tIns="0" bIns="0" anchor="t">
+          <a:bodyPr wrap="square" lIns="0" tIns="0" rIns="0" bIns="0" anchor="t">
             <a:spAutoFit/>
           </a:bodyPr>
           <a:lstStyle/>
@@ -5045,7 +4510,7 @@
           <a:noFill/>
         </p:spPr>
         <p:txBody>
-          <a:bodyPr wrap="square" lIns="0" rIns="0" tIns="0" bIns="0" anchor="t">
+          <a:bodyPr wrap="square" lIns="0" tIns="0" rIns="0" bIns="0" anchor="t">
             <a:spAutoFit/>
           </a:bodyPr>
           <a:lstStyle/>
@@ -5084,7 +4549,7 @@
           <a:noFill/>
         </p:spPr>
         <p:txBody>
-          <a:bodyPr wrap="square" lIns="0" rIns="0" tIns="0" bIns="0" anchor="t">
+          <a:bodyPr wrap="square" lIns="0" tIns="0" rIns="0" bIns="0" anchor="t">
             <a:spAutoFit/>
           </a:bodyPr>
           <a:lstStyle/>
@@ -5133,7 +4598,7 @@
           <p:nvPr/>
         </p:nvPicPr>
         <p:blipFill>
-          <a:blip r:embed="rId2"/>
+          <a:blip r:embed="rId3"/>
           <a:stretch>
             <a:fillRect/>
           </a:stretch>
@@ -5188,6 +4653,7 @@
           <a:lstStyle/>
           <a:p>
             <a:pPr algn="ctr"/>
+            <a:endParaRPr/>
           </a:p>
         </p:txBody>
       </p:sp>
@@ -5208,7 +4674,7 @@
           <a:noFill/>
         </p:spPr>
         <p:txBody>
-          <a:bodyPr wrap="square" lIns="0" rIns="0" tIns="0" bIns="0" anchor="t">
+          <a:bodyPr wrap="square" lIns="0" tIns="0" rIns="0" bIns="0" anchor="t">
             <a:spAutoFit/>
           </a:bodyPr>
           <a:lstStyle/>
@@ -5270,6 +4736,7 @@
           <a:lstStyle/>
           <a:p>
             <a:pPr algn="ctr"/>
+            <a:endParaRPr/>
           </a:p>
         </p:txBody>
       </p:sp>
@@ -5313,6 +4780,7 @@
           <a:lstStyle/>
           <a:p>
             <a:pPr algn="ctr"/>
+            <a:endParaRPr/>
           </a:p>
         </p:txBody>
       </p:sp>
@@ -5333,7 +4801,7 @@
           <a:noFill/>
         </p:spPr>
         <p:txBody>
-          <a:bodyPr wrap="square" lIns="0" rIns="0" tIns="0" bIns="0" anchor="t">
+          <a:bodyPr wrap="square" lIns="0" tIns="0" rIns="0" bIns="0" anchor="t">
             <a:spAutoFit/>
           </a:bodyPr>
           <a:lstStyle/>
@@ -5372,7 +4840,7 @@
           <a:noFill/>
         </p:spPr>
         <p:txBody>
-          <a:bodyPr wrap="square" lIns="0" rIns="0" tIns="0" bIns="0" anchor="t">
+          <a:bodyPr wrap="square" lIns="0" tIns="0" rIns="0" bIns="0" anchor="t">
             <a:spAutoFit/>
           </a:bodyPr>
           <a:lstStyle/>
@@ -5429,7 +4897,7 @@
           <a:noFill/>
         </p:spPr>
         <p:txBody>
-          <a:bodyPr wrap="square" lIns="0" rIns="0" tIns="0" bIns="0" anchor="t">
+          <a:bodyPr wrap="square" lIns="0" tIns="0" rIns="0" bIns="0" anchor="t">
             <a:spAutoFit/>
           </a:bodyPr>
           <a:lstStyle/>
@@ -5528,7 +4996,7 @@
           <a:noFill/>
         </p:spPr>
         <p:txBody>
-          <a:bodyPr wrap="square" lIns="0" rIns="0" tIns="0" bIns="0" anchor="ctr">
+          <a:bodyPr wrap="square" lIns="0" tIns="0" rIns="0" bIns="0" anchor="ctr">
             <a:spAutoFit/>
           </a:bodyPr>
           <a:lstStyle/>
@@ -5559,7 +5027,7 @@
 </file>
 
 <file path=ppt/slides/slide11.xml><?xml version="1.0" encoding="utf-8"?>
-<p:sld xmlns:a="http://schemas.openxmlformats.org/drawingml/2006/main" xmlns:p="http://schemas.openxmlformats.org/presentationml/2006/main" xmlns:r="http://schemas.openxmlformats.org/officeDocument/2006/relationships">
+<p:sld xmlns:a="http://schemas.openxmlformats.org/drawingml/2006/main" xmlns:r="http://schemas.openxmlformats.org/officeDocument/2006/relationships" xmlns:p="http://schemas.openxmlformats.org/presentationml/2006/main">
   <p:cSld>
     <p:spTree>
       <p:nvGrpSpPr>
@@ -5567,7 +5035,14 @@
         <p:cNvGrpSpPr/>
         <p:nvPr/>
       </p:nvGrpSpPr>
-      <p:grpSpPr/>
+      <p:grpSpPr>
+        <a:xfrm>
+          <a:off x="0" y="0"/>
+          <a:ext cx="0" cy="0"/>
+          <a:chOff x="0" y="0"/>
+          <a:chExt cx="0" cy="0"/>
+        </a:xfrm>
+      </p:grpSpPr>
       <p:sp>
         <p:nvSpPr>
           <p:cNvPr id="2" name="Rectangle 1"/>
@@ -5609,6 +5084,7 @@
           <a:lstStyle/>
           <a:p>
             <a:pPr algn="ctr"/>
+            <a:endParaRPr/>
           </a:p>
         </p:txBody>
       </p:sp>
@@ -5629,7 +5105,7 @@
           <a:noFill/>
         </p:spPr>
         <p:txBody>
-          <a:bodyPr wrap="square" lIns="0" rIns="0" tIns="0" bIns="0" anchor="t">
+          <a:bodyPr wrap="square" lIns="0" tIns="0" rIns="0" bIns="0" anchor="t">
             <a:spAutoFit/>
           </a:bodyPr>
           <a:lstStyle/>
@@ -5668,7 +5144,7 @@
           <a:noFill/>
         </p:spPr>
         <p:txBody>
-          <a:bodyPr wrap="square" lIns="0" rIns="0" tIns="0" bIns="0" anchor="t">
+          <a:bodyPr wrap="square" lIns="0" tIns="0" rIns="0" bIns="0" anchor="t">
             <a:spAutoFit/>
           </a:bodyPr>
           <a:lstStyle/>
@@ -5707,7 +5183,7 @@
           <a:noFill/>
         </p:spPr>
         <p:txBody>
-          <a:bodyPr wrap="square" lIns="0" rIns="0" tIns="0" bIns="0" anchor="t">
+          <a:bodyPr wrap="square" lIns="0" tIns="0" rIns="0" bIns="0" anchor="t">
             <a:spAutoFit/>
           </a:bodyPr>
           <a:lstStyle/>
@@ -5746,7 +5222,7 @@
           <a:noFill/>
         </p:spPr>
         <p:txBody>
-          <a:bodyPr wrap="square" lIns="0" rIns="0" tIns="0" bIns="0" anchor="t">
+          <a:bodyPr wrap="square" lIns="0" tIns="0" rIns="0" bIns="0" anchor="t">
             <a:spAutoFit/>
           </a:bodyPr>
           <a:lstStyle/>
@@ -5826,6 +5302,7 @@
           <a:lstStyle/>
           <a:p>
             <a:pPr algn="ctr"/>
+            <a:endParaRPr/>
           </a:p>
         </p:txBody>
       </p:sp>
@@ -5846,7 +5323,7 @@
           <a:noFill/>
         </p:spPr>
         <p:txBody>
-          <a:bodyPr wrap="square" lIns="0" rIns="0" tIns="0" bIns="0" anchor="t">
+          <a:bodyPr wrap="square" lIns="0" tIns="0" rIns="0" bIns="0" anchor="t">
             <a:spAutoFit/>
           </a:bodyPr>
           <a:lstStyle/>
@@ -5885,7 +5362,7 @@
           <a:noFill/>
         </p:spPr>
         <p:txBody>
-          <a:bodyPr wrap="square" lIns="0" rIns="0" tIns="0" bIns="0" anchor="t">
+          <a:bodyPr wrap="square" lIns="0" tIns="0" rIns="0" bIns="0" anchor="t">
             <a:spAutoFit/>
           </a:bodyPr>
           <a:lstStyle/>
@@ -5924,7 +5401,7 @@
           <a:noFill/>
         </p:spPr>
         <p:txBody>
-          <a:bodyPr wrap="square" lIns="0" rIns="0" tIns="0" bIns="0" anchor="t">
+          <a:bodyPr wrap="square" lIns="0" tIns="0" rIns="0" bIns="0" anchor="t">
             <a:spAutoFit/>
           </a:bodyPr>
           <a:lstStyle/>
@@ -5986,6 +5463,7 @@
           <a:lstStyle/>
           <a:p>
             <a:pPr algn="ctr"/>
+            <a:endParaRPr/>
           </a:p>
         </p:txBody>
       </p:sp>
@@ -6006,7 +5484,7 @@
           <a:noFill/>
         </p:spPr>
         <p:txBody>
-          <a:bodyPr wrap="square" lIns="0" rIns="0" tIns="0" bIns="0" anchor="t">
+          <a:bodyPr wrap="square" lIns="0" tIns="0" rIns="0" bIns="0" anchor="t">
             <a:spAutoFit/>
           </a:bodyPr>
           <a:lstStyle/>
@@ -6045,7 +5523,7 @@
           <a:noFill/>
         </p:spPr>
         <p:txBody>
-          <a:bodyPr wrap="square" lIns="0" rIns="0" tIns="0" bIns="0" anchor="t">
+          <a:bodyPr wrap="square" lIns="0" tIns="0" rIns="0" bIns="0" anchor="t">
             <a:spAutoFit/>
           </a:bodyPr>
           <a:lstStyle/>
@@ -6084,7 +5562,7 @@
           <a:noFill/>
         </p:spPr>
         <p:txBody>
-          <a:bodyPr wrap="square" lIns="0" rIns="0" tIns="0" bIns="0" anchor="t">
+          <a:bodyPr wrap="square" lIns="0" tIns="0" rIns="0" bIns="0" anchor="t">
             <a:spAutoFit/>
           </a:bodyPr>
           <a:lstStyle/>
@@ -6123,7 +5601,7 @@
           <a:noFill/>
         </p:spPr>
         <p:txBody>
-          <a:bodyPr wrap="square" lIns="0" rIns="0" tIns="0" bIns="0" anchor="t">
+          <a:bodyPr wrap="square" lIns="0" tIns="0" rIns="0" bIns="0" anchor="t">
             <a:spAutoFit/>
           </a:bodyPr>
           <a:lstStyle/>
@@ -6154,7 +5632,7 @@
 </file>
 
 <file path=ppt/slides/slide12.xml><?xml version="1.0" encoding="utf-8"?>
-<p:sld xmlns:a="http://schemas.openxmlformats.org/drawingml/2006/main" xmlns:p="http://schemas.openxmlformats.org/presentationml/2006/main" xmlns:r="http://schemas.openxmlformats.org/officeDocument/2006/relationships">
+<p:sld xmlns:a="http://schemas.openxmlformats.org/drawingml/2006/main" xmlns:r="http://schemas.openxmlformats.org/officeDocument/2006/relationships" xmlns:p="http://schemas.openxmlformats.org/presentationml/2006/main">
   <p:cSld>
     <p:spTree>
       <p:nvGrpSpPr>
@@ -6162,7 +5640,14 @@
         <p:cNvGrpSpPr/>
         <p:nvPr/>
       </p:nvGrpSpPr>
-      <p:grpSpPr/>
+      <p:grpSpPr>
+        <a:xfrm>
+          <a:off x="0" y="0"/>
+          <a:ext cx="0" cy="0"/>
+          <a:chOff x="0" y="0"/>
+          <a:chExt cx="0" cy="0"/>
+        </a:xfrm>
+      </p:grpSpPr>
       <p:sp>
         <p:nvSpPr>
           <p:cNvPr id="2" name="Rectangle 1"/>
@@ -6204,6 +5689,7 @@
           <a:lstStyle/>
           <a:p>
             <a:pPr algn="ctr"/>
+            <a:endParaRPr/>
           </a:p>
         </p:txBody>
       </p:sp>
@@ -6224,7 +5710,7 @@
           <a:noFill/>
         </p:spPr>
         <p:txBody>
-          <a:bodyPr wrap="square" lIns="0" rIns="0" tIns="0" bIns="0" anchor="t">
+          <a:bodyPr wrap="square" lIns="0" tIns="0" rIns="0" bIns="0" anchor="t">
             <a:spAutoFit/>
           </a:bodyPr>
           <a:lstStyle/>
@@ -6263,7 +5749,7 @@
           <a:noFill/>
         </p:spPr>
         <p:txBody>
-          <a:bodyPr wrap="square" lIns="0" rIns="0" tIns="0" bIns="0" anchor="t">
+          <a:bodyPr wrap="square" lIns="0" tIns="0" rIns="0" bIns="0" anchor="t">
             <a:spAutoFit/>
           </a:bodyPr>
           <a:lstStyle/>
@@ -6302,7 +5788,7 @@
           <a:noFill/>
         </p:spPr>
         <p:txBody>
-          <a:bodyPr wrap="square" lIns="0" rIns="0" tIns="0" bIns="0" anchor="t">
+          <a:bodyPr wrap="square" lIns="0" tIns="0" rIns="0" bIns="0" anchor="t">
             <a:spAutoFit/>
           </a:bodyPr>
           <a:lstStyle/>
@@ -6341,7 +5827,7 @@
           <a:noFill/>
         </p:spPr>
         <p:txBody>
-          <a:bodyPr wrap="square" lIns="0" rIns="0" tIns="0" bIns="0" anchor="t">
+          <a:bodyPr wrap="square" lIns="0" tIns="0" rIns="0" bIns="0" anchor="t">
             <a:spAutoFit/>
           </a:bodyPr>
           <a:lstStyle/>
@@ -6417,7 +5903,7 @@
           <a:noFill/>
         </p:spPr>
         <p:txBody>
-          <a:bodyPr wrap="square" lIns="0" rIns="0" tIns="0" bIns="0" anchor="t">
+          <a:bodyPr wrap="square" lIns="0" tIns="0" rIns="0" bIns="0" anchor="t">
             <a:spAutoFit/>
           </a:bodyPr>
           <a:lstStyle/>
@@ -6479,6 +5965,7 @@
           <a:lstStyle/>
           <a:p>
             <a:pPr algn="ctr"/>
+            <a:endParaRPr/>
           </a:p>
         </p:txBody>
       </p:sp>
@@ -6499,7 +5986,7 @@
           <a:noFill/>
         </p:spPr>
         <p:txBody>
-          <a:bodyPr wrap="square" lIns="0" rIns="0" tIns="0" bIns="0" anchor="t">
+          <a:bodyPr wrap="square" lIns="0" tIns="0" rIns="0" bIns="0" anchor="t">
             <a:spAutoFit/>
           </a:bodyPr>
           <a:lstStyle/>
@@ -6530,7 +6017,7 @@
 </file>
 
 <file path=ppt/slides/slide2.xml><?xml version="1.0" encoding="utf-8"?>
-<p:sld xmlns:a="http://schemas.openxmlformats.org/drawingml/2006/main" xmlns:p="http://schemas.openxmlformats.org/presentationml/2006/main" xmlns:r="http://schemas.openxmlformats.org/officeDocument/2006/relationships">
+<p:sld xmlns:a="http://schemas.openxmlformats.org/drawingml/2006/main" xmlns:r="http://schemas.openxmlformats.org/officeDocument/2006/relationships" xmlns:p="http://schemas.openxmlformats.org/presentationml/2006/main">
   <p:cSld>
     <p:spTree>
       <p:nvGrpSpPr>
@@ -6538,7 +6025,14 @@
         <p:cNvGrpSpPr/>
         <p:nvPr/>
       </p:nvGrpSpPr>
-      <p:grpSpPr/>
+      <p:grpSpPr>
+        <a:xfrm>
+          <a:off x="0" y="0"/>
+          <a:ext cx="0" cy="0"/>
+          <a:chOff x="0" y="0"/>
+          <a:chExt cx="0" cy="0"/>
+        </a:xfrm>
+      </p:grpSpPr>
       <p:sp>
         <p:nvSpPr>
           <p:cNvPr id="2" name="Rectangle 1"/>
@@ -6580,6 +6074,7 @@
           <a:lstStyle/>
           <a:p>
             <a:pPr algn="ctr"/>
+            <a:endParaRPr/>
           </a:p>
         </p:txBody>
       </p:sp>
@@ -6600,7 +6095,7 @@
           <a:noFill/>
         </p:spPr>
         <p:txBody>
-          <a:bodyPr wrap="square" lIns="0" rIns="0" tIns="0" bIns="0" anchor="t">
+          <a:bodyPr wrap="square" lIns="0" tIns="0" rIns="0" bIns="0" anchor="t">
             <a:spAutoFit/>
           </a:bodyPr>
           <a:lstStyle/>
@@ -6639,7 +6134,7 @@
           <a:noFill/>
         </p:spPr>
         <p:txBody>
-          <a:bodyPr wrap="square" lIns="0" rIns="0" tIns="0" bIns="0" anchor="t">
+          <a:bodyPr wrap="square" lIns="0" tIns="0" rIns="0" bIns="0" anchor="t">
             <a:spAutoFit/>
           </a:bodyPr>
           <a:lstStyle/>
@@ -6678,7 +6173,7 @@
           <a:noFill/>
         </p:spPr>
         <p:txBody>
-          <a:bodyPr wrap="square" lIns="0" rIns="0" tIns="0" bIns="0" anchor="t">
+          <a:bodyPr wrap="square" lIns="0" tIns="0" rIns="0" bIns="0" anchor="t">
             <a:spAutoFit/>
           </a:bodyPr>
           <a:lstStyle/>
@@ -6717,7 +6212,7 @@
           <a:noFill/>
         </p:spPr>
         <p:txBody>
-          <a:bodyPr wrap="square" lIns="0" rIns="0" tIns="0" bIns="0" anchor="t">
+          <a:bodyPr wrap="square" lIns="0" tIns="0" rIns="0" bIns="0" anchor="t">
             <a:spAutoFit/>
           </a:bodyPr>
           <a:lstStyle/>
@@ -6788,6 +6283,7 @@
           <a:lstStyle/>
           <a:p>
             <a:pPr algn="ctr"/>
+            <a:endParaRPr/>
           </a:p>
         </p:txBody>
       </p:sp>
@@ -6831,6 +6327,7 @@
           <a:lstStyle/>
           <a:p>
             <a:pPr algn="ctr"/>
+            <a:endParaRPr/>
           </a:p>
         </p:txBody>
       </p:sp>
@@ -6851,7 +6348,7 @@
           <a:noFill/>
         </p:spPr>
         <p:txBody>
-          <a:bodyPr wrap="square" lIns="0" rIns="0" tIns="0" bIns="0" anchor="t">
+          <a:bodyPr wrap="square" lIns="0" tIns="0" rIns="0" bIns="0" anchor="t">
             <a:spAutoFit/>
           </a:bodyPr>
           <a:lstStyle/>
@@ -6890,7 +6387,7 @@
           <a:noFill/>
         </p:spPr>
         <p:txBody>
-          <a:bodyPr wrap="square" lIns="0" rIns="0" tIns="0" bIns="0" anchor="t">
+          <a:bodyPr wrap="square" lIns="0" tIns="0" rIns="0" bIns="0" anchor="t">
             <a:spAutoFit/>
           </a:bodyPr>
           <a:lstStyle/>
@@ -6948,7 +6445,7 @@
           </a:fontRef>
         </p:style>
         <p:txBody>
-          <a:bodyPr rtlCol="0" anchor="ctr" lIns="109728" rIns="109728" tIns="18288" bIns="18288"/>
+          <a:bodyPr lIns="109728" tIns="18288" rIns="109728" bIns="18288" rtlCol="0" anchor="ctr"/>
           <a:lstStyle/>
           <a:p>
             <a:pPr algn="ctr"/>
@@ -6981,7 +6478,7 @@
           <a:noFill/>
         </p:spPr>
         <p:txBody>
-          <a:bodyPr wrap="square" lIns="0" rIns="0" tIns="0" bIns="0" anchor="t">
+          <a:bodyPr wrap="square" lIns="0" tIns="0" rIns="0" bIns="0" anchor="t">
             <a:spAutoFit/>
           </a:bodyPr>
           <a:lstStyle/>
@@ -7043,6 +6540,7 @@
           <a:lstStyle/>
           <a:p>
             <a:pPr algn="ctr"/>
+            <a:endParaRPr/>
           </a:p>
         </p:txBody>
       </p:sp>
@@ -7086,6 +6584,7 @@
           <a:lstStyle/>
           <a:p>
             <a:pPr algn="ctr"/>
+            <a:endParaRPr/>
           </a:p>
         </p:txBody>
       </p:sp>
@@ -7106,7 +6605,7 @@
           <a:noFill/>
         </p:spPr>
         <p:txBody>
-          <a:bodyPr wrap="square" lIns="0" rIns="0" tIns="0" bIns="0" anchor="t">
+          <a:bodyPr wrap="square" lIns="0" tIns="0" rIns="0" bIns="0" anchor="t">
             <a:spAutoFit/>
           </a:bodyPr>
           <a:lstStyle/>
@@ -7145,7 +6644,7 @@
           <a:noFill/>
         </p:spPr>
         <p:txBody>
-          <a:bodyPr wrap="square" lIns="0" rIns="0" tIns="0" bIns="0" anchor="t">
+          <a:bodyPr wrap="square" lIns="0" tIns="0" rIns="0" bIns="0" anchor="t">
             <a:spAutoFit/>
           </a:bodyPr>
           <a:lstStyle/>
@@ -7203,7 +6702,7 @@
           </a:fontRef>
         </p:style>
         <p:txBody>
-          <a:bodyPr rtlCol="0" anchor="ctr" lIns="109728" rIns="109728" tIns="18288" bIns="18288"/>
+          <a:bodyPr lIns="109728" tIns="18288" rIns="109728" bIns="18288" rtlCol="0" anchor="ctr"/>
           <a:lstStyle/>
           <a:p>
             <a:pPr algn="ctr"/>
@@ -7236,7 +6735,7 @@
           <a:noFill/>
         </p:spPr>
         <p:txBody>
-          <a:bodyPr wrap="square" lIns="0" rIns="0" tIns="0" bIns="0" anchor="t">
+          <a:bodyPr wrap="square" lIns="0" tIns="0" rIns="0" bIns="0" anchor="t">
             <a:spAutoFit/>
           </a:bodyPr>
           <a:lstStyle/>
@@ -7298,6 +6797,7 @@
           <a:lstStyle/>
           <a:p>
             <a:pPr algn="ctr"/>
+            <a:endParaRPr/>
           </a:p>
         </p:txBody>
       </p:sp>
@@ -7341,6 +6841,7 @@
           <a:lstStyle/>
           <a:p>
             <a:pPr algn="ctr"/>
+            <a:endParaRPr/>
           </a:p>
         </p:txBody>
       </p:sp>
@@ -7361,7 +6862,7 @@
           <a:noFill/>
         </p:spPr>
         <p:txBody>
-          <a:bodyPr wrap="square" lIns="0" rIns="0" tIns="0" bIns="0" anchor="t">
+          <a:bodyPr wrap="square" lIns="0" tIns="0" rIns="0" bIns="0" anchor="t">
             <a:spAutoFit/>
           </a:bodyPr>
           <a:lstStyle/>
@@ -7400,7 +6901,7 @@
           <a:noFill/>
         </p:spPr>
         <p:txBody>
-          <a:bodyPr wrap="square" lIns="0" rIns="0" tIns="0" bIns="0" anchor="t">
+          <a:bodyPr wrap="square" lIns="0" tIns="0" rIns="0" bIns="0" anchor="t">
             <a:spAutoFit/>
           </a:bodyPr>
           <a:lstStyle/>
@@ -7458,7 +6959,7 @@
           </a:fontRef>
         </p:style>
         <p:txBody>
-          <a:bodyPr rtlCol="0" anchor="ctr" lIns="109728" rIns="109728" tIns="18288" bIns="18288"/>
+          <a:bodyPr lIns="109728" tIns="18288" rIns="109728" bIns="18288" rtlCol="0" anchor="ctr"/>
           <a:lstStyle/>
           <a:p>
             <a:pPr algn="ctr"/>
@@ -7491,7 +6992,7 @@
           <a:noFill/>
         </p:spPr>
         <p:txBody>
-          <a:bodyPr wrap="square" lIns="0" rIns="0" tIns="0" bIns="0" anchor="t">
+          <a:bodyPr wrap="square" lIns="0" tIns="0" rIns="0" bIns="0" anchor="t">
             <a:spAutoFit/>
           </a:bodyPr>
           <a:lstStyle/>
@@ -7553,6 +7054,7 @@
           <a:lstStyle/>
           <a:p>
             <a:pPr algn="ctr"/>
+            <a:endParaRPr/>
           </a:p>
         </p:txBody>
       </p:sp>
@@ -7596,6 +7098,7 @@
           <a:lstStyle/>
           <a:p>
             <a:pPr algn="ctr"/>
+            <a:endParaRPr/>
           </a:p>
         </p:txBody>
       </p:sp>
@@ -7616,7 +7119,7 @@
           <a:noFill/>
         </p:spPr>
         <p:txBody>
-          <a:bodyPr wrap="square" lIns="0" rIns="0" tIns="0" bIns="0" anchor="t">
+          <a:bodyPr wrap="square" lIns="0" tIns="0" rIns="0" bIns="0" anchor="t">
             <a:spAutoFit/>
           </a:bodyPr>
           <a:lstStyle/>
@@ -7655,7 +7158,7 @@
           <a:noFill/>
         </p:spPr>
         <p:txBody>
-          <a:bodyPr wrap="square" lIns="0" rIns="0" tIns="0" bIns="0" anchor="t">
+          <a:bodyPr wrap="square" lIns="0" tIns="0" rIns="0" bIns="0" anchor="t">
             <a:spAutoFit/>
           </a:bodyPr>
           <a:lstStyle/>
@@ -7713,7 +7216,7 @@
           </a:fontRef>
         </p:style>
         <p:txBody>
-          <a:bodyPr rtlCol="0" anchor="ctr" lIns="109728" rIns="109728" tIns="18288" bIns="18288"/>
+          <a:bodyPr lIns="109728" tIns="18288" rIns="109728" bIns="18288" rtlCol="0" anchor="ctr"/>
           <a:lstStyle/>
           <a:p>
             <a:pPr algn="ctr"/>
@@ -7746,7 +7249,7 @@
           <a:noFill/>
         </p:spPr>
         <p:txBody>
-          <a:bodyPr wrap="square" lIns="0" rIns="0" tIns="0" bIns="0" anchor="t">
+          <a:bodyPr wrap="square" lIns="0" tIns="0" rIns="0" bIns="0" anchor="t">
             <a:spAutoFit/>
           </a:bodyPr>
           <a:lstStyle/>
@@ -7808,6 +7311,7 @@
           <a:lstStyle/>
           <a:p>
             <a:pPr algn="ctr"/>
+            <a:endParaRPr/>
           </a:p>
         </p:txBody>
       </p:sp>
@@ -7851,6 +7355,7 @@
           <a:lstStyle/>
           <a:p>
             <a:pPr algn="ctr"/>
+            <a:endParaRPr/>
           </a:p>
         </p:txBody>
       </p:sp>
@@ -7871,7 +7376,7 @@
           <a:noFill/>
         </p:spPr>
         <p:txBody>
-          <a:bodyPr wrap="square" lIns="0" rIns="0" tIns="0" bIns="0" anchor="t">
+          <a:bodyPr wrap="square" lIns="0" tIns="0" rIns="0" bIns="0" anchor="t">
             <a:spAutoFit/>
           </a:bodyPr>
           <a:lstStyle/>
@@ -7910,7 +7415,7 @@
           <a:noFill/>
         </p:spPr>
         <p:txBody>
-          <a:bodyPr wrap="square" lIns="0" rIns="0" tIns="0" bIns="0" anchor="t">
+          <a:bodyPr wrap="square" lIns="0" tIns="0" rIns="0" bIns="0" anchor="t">
             <a:spAutoFit/>
           </a:bodyPr>
           <a:lstStyle/>
@@ -7968,7 +7473,7 @@
           </a:fontRef>
         </p:style>
         <p:txBody>
-          <a:bodyPr rtlCol="0" anchor="ctr" lIns="109728" rIns="109728" tIns="18288" bIns="18288"/>
+          <a:bodyPr lIns="109728" tIns="18288" rIns="109728" bIns="18288" rtlCol="0" anchor="ctr"/>
           <a:lstStyle/>
           <a:p>
             <a:pPr algn="ctr"/>
@@ -8001,7 +7506,7 @@
           <a:noFill/>
         </p:spPr>
         <p:txBody>
-          <a:bodyPr wrap="square" lIns="0" rIns="0" tIns="0" bIns="0" anchor="t">
+          <a:bodyPr wrap="square" lIns="0" tIns="0" rIns="0" bIns="0" anchor="t">
             <a:spAutoFit/>
           </a:bodyPr>
           <a:lstStyle/>
@@ -8040,7 +7545,7 @@
           <a:noFill/>
         </p:spPr>
         <p:txBody>
-          <a:bodyPr wrap="square" lIns="0" rIns="0" tIns="0" bIns="0" anchor="t">
+          <a:bodyPr wrap="square" lIns="0" tIns="0" rIns="0" bIns="0" anchor="t">
             <a:spAutoFit/>
           </a:bodyPr>
           <a:lstStyle/>
@@ -8071,7 +7576,7 @@
 </file>
 
 <file path=ppt/slides/slide3.xml><?xml version="1.0" encoding="utf-8"?>
-<p:sld xmlns:a="http://schemas.openxmlformats.org/drawingml/2006/main" xmlns:p="http://schemas.openxmlformats.org/presentationml/2006/main" xmlns:r="http://schemas.openxmlformats.org/officeDocument/2006/relationships">
+<p:sld xmlns:a="http://schemas.openxmlformats.org/drawingml/2006/main" xmlns:r="http://schemas.openxmlformats.org/officeDocument/2006/relationships" xmlns:p="http://schemas.openxmlformats.org/presentationml/2006/main">
   <p:cSld>
     <p:spTree>
       <p:nvGrpSpPr>
@@ -8079,7 +7584,14 @@
         <p:cNvGrpSpPr/>
         <p:nvPr/>
       </p:nvGrpSpPr>
-      <p:grpSpPr/>
+      <p:grpSpPr>
+        <a:xfrm>
+          <a:off x="0" y="0"/>
+          <a:ext cx="0" cy="0"/>
+          <a:chOff x="0" y="0"/>
+          <a:chExt cx="0" cy="0"/>
+        </a:xfrm>
+      </p:grpSpPr>
       <p:sp>
         <p:nvSpPr>
           <p:cNvPr id="2" name="Rectangle 1"/>
@@ -8121,6 +7633,7 @@
           <a:lstStyle/>
           <a:p>
             <a:pPr algn="ctr"/>
+            <a:endParaRPr/>
           </a:p>
         </p:txBody>
       </p:sp>
@@ -8141,7 +7654,7 @@
           <a:noFill/>
         </p:spPr>
         <p:txBody>
-          <a:bodyPr wrap="square" lIns="0" rIns="0" tIns="0" bIns="0" anchor="t">
+          <a:bodyPr wrap="square" lIns="0" tIns="0" rIns="0" bIns="0" anchor="t">
             <a:spAutoFit/>
           </a:bodyPr>
           <a:lstStyle/>
@@ -8180,7 +7693,7 @@
           <a:noFill/>
         </p:spPr>
         <p:txBody>
-          <a:bodyPr wrap="square" lIns="0" rIns="0" tIns="0" bIns="0" anchor="t">
+          <a:bodyPr wrap="square" lIns="0" tIns="0" rIns="0" bIns="0" anchor="t">
             <a:spAutoFit/>
           </a:bodyPr>
           <a:lstStyle/>
@@ -8219,7 +7732,7 @@
           <a:noFill/>
         </p:spPr>
         <p:txBody>
-          <a:bodyPr wrap="square" lIns="0" rIns="0" tIns="0" bIns="0" anchor="t">
+          <a:bodyPr wrap="square" lIns="0" tIns="0" rIns="0" bIns="0" anchor="t">
             <a:spAutoFit/>
           </a:bodyPr>
           <a:lstStyle/>
@@ -8258,7 +7771,7 @@
           <a:noFill/>
         </p:spPr>
         <p:txBody>
-          <a:bodyPr wrap="square" lIns="0" rIns="0" tIns="0" bIns="0" anchor="t">
+          <a:bodyPr wrap="square" lIns="0" tIns="0" rIns="0" bIns="0" anchor="t">
             <a:spAutoFit/>
           </a:bodyPr>
           <a:lstStyle/>
@@ -8320,6 +7833,7 @@
           <a:lstStyle/>
           <a:p>
             <a:pPr algn="ctr"/>
+            <a:endParaRPr/>
           </a:p>
         </p:txBody>
       </p:sp>
@@ -8340,7 +7854,7 @@
           <a:noFill/>
         </p:spPr>
         <p:txBody>
-          <a:bodyPr wrap="square" lIns="0" rIns="0" tIns="0" bIns="0" anchor="t">
+          <a:bodyPr wrap="square" lIns="0" tIns="0" rIns="0" bIns="0" anchor="t">
             <a:spAutoFit/>
           </a:bodyPr>
           <a:lstStyle/>
@@ -8379,7 +7893,7 @@
           <a:noFill/>
         </p:spPr>
         <p:txBody>
-          <a:bodyPr wrap="square" lIns="0" rIns="0" tIns="0" bIns="0" anchor="t">
+          <a:bodyPr wrap="square" lIns="0" tIns="0" rIns="0" bIns="0" anchor="t">
             <a:spAutoFit/>
           </a:bodyPr>
           <a:lstStyle/>
@@ -8418,7 +7932,7 @@
           <a:noFill/>
         </p:spPr>
         <p:txBody>
-          <a:bodyPr wrap="square" lIns="0" rIns="0" tIns="0" bIns="0" anchor="t">
+          <a:bodyPr wrap="square" lIns="0" tIns="0" rIns="0" bIns="0" anchor="t">
             <a:spAutoFit/>
           </a:bodyPr>
           <a:lstStyle/>
@@ -8539,6 +8053,7 @@
           <a:lstStyle/>
           <a:p>
             <a:pPr algn="ctr"/>
+            <a:endParaRPr/>
           </a:p>
         </p:txBody>
       </p:sp>
@@ -8559,7 +8074,7 @@
           <a:noFill/>
         </p:spPr>
         <p:txBody>
-          <a:bodyPr wrap="square" lIns="0" rIns="0" tIns="0" bIns="0" anchor="t">
+          <a:bodyPr wrap="square" lIns="0" tIns="0" rIns="0" bIns="0" anchor="t">
             <a:spAutoFit/>
           </a:bodyPr>
           <a:lstStyle/>
@@ -8598,7 +8113,7 @@
           <a:noFill/>
         </p:spPr>
         <p:txBody>
-          <a:bodyPr wrap="square" lIns="0" rIns="0" tIns="0" bIns="0" anchor="t">
+          <a:bodyPr wrap="square" lIns="0" tIns="0" rIns="0" bIns="0" anchor="t">
             <a:spAutoFit/>
           </a:bodyPr>
           <a:lstStyle/>
@@ -8637,7 +8152,7 @@
           <a:noFill/>
         </p:spPr>
         <p:txBody>
-          <a:bodyPr wrap="square" lIns="0" rIns="0" tIns="0" bIns="0" anchor="t">
+          <a:bodyPr wrap="square" lIns="0" tIns="0" rIns="0" bIns="0" anchor="t">
             <a:spAutoFit/>
           </a:bodyPr>
           <a:lstStyle/>
@@ -8735,7 +8250,7 @@
           <a:noFill/>
         </p:spPr>
         <p:txBody>
-          <a:bodyPr wrap="square" lIns="0" rIns="0" tIns="0" bIns="0" anchor="t">
+          <a:bodyPr wrap="square" lIns="0" tIns="0" rIns="0" bIns="0" anchor="t">
             <a:spAutoFit/>
           </a:bodyPr>
           <a:lstStyle/>
@@ -8766,7 +8281,7 @@
 </file>
 
 <file path=ppt/slides/slide4.xml><?xml version="1.0" encoding="utf-8"?>
-<p:sld xmlns:a="http://schemas.openxmlformats.org/drawingml/2006/main" xmlns:p="http://schemas.openxmlformats.org/presentationml/2006/main" xmlns:r="http://schemas.openxmlformats.org/officeDocument/2006/relationships">
+<p:sld xmlns:a="http://schemas.openxmlformats.org/drawingml/2006/main" xmlns:r="http://schemas.openxmlformats.org/officeDocument/2006/relationships" xmlns:p="http://schemas.openxmlformats.org/presentationml/2006/main">
   <p:cSld>
     <p:spTree>
       <p:nvGrpSpPr>
@@ -8774,7 +8289,14 @@
         <p:cNvGrpSpPr/>
         <p:nvPr/>
       </p:nvGrpSpPr>
-      <p:grpSpPr/>
+      <p:grpSpPr>
+        <a:xfrm>
+          <a:off x="0" y="0"/>
+          <a:ext cx="0" cy="0"/>
+          <a:chOff x="0" y="0"/>
+          <a:chExt cx="0" cy="0"/>
+        </a:xfrm>
+      </p:grpSpPr>
       <p:sp>
         <p:nvSpPr>
           <p:cNvPr id="2" name="Rectangle 1"/>
@@ -8816,6 +8338,7 @@
           <a:lstStyle/>
           <a:p>
             <a:pPr algn="ctr"/>
+            <a:endParaRPr/>
           </a:p>
         </p:txBody>
       </p:sp>
@@ -8836,7 +8359,7 @@
           <a:noFill/>
         </p:spPr>
         <p:txBody>
-          <a:bodyPr wrap="square" lIns="0" rIns="0" tIns="0" bIns="0" anchor="t">
+          <a:bodyPr wrap="square" lIns="0" tIns="0" rIns="0" bIns="0" anchor="t">
             <a:spAutoFit/>
           </a:bodyPr>
           <a:lstStyle/>
@@ -8875,7 +8398,7 @@
           <a:noFill/>
         </p:spPr>
         <p:txBody>
-          <a:bodyPr wrap="square" lIns="0" rIns="0" tIns="0" bIns="0" anchor="t">
+          <a:bodyPr wrap="square" lIns="0" tIns="0" rIns="0" bIns="0" anchor="t">
             <a:spAutoFit/>
           </a:bodyPr>
           <a:lstStyle/>
@@ -8914,7 +8437,7 @@
           <a:noFill/>
         </p:spPr>
         <p:txBody>
-          <a:bodyPr wrap="square" lIns="0" rIns="0" tIns="0" bIns="0" anchor="t">
+          <a:bodyPr wrap="square" lIns="0" tIns="0" rIns="0" bIns="0" anchor="t">
             <a:spAutoFit/>
           </a:bodyPr>
           <a:lstStyle/>
@@ -8953,7 +8476,7 @@
           <a:noFill/>
         </p:spPr>
         <p:txBody>
-          <a:bodyPr wrap="square" lIns="0" rIns="0" tIns="0" bIns="0" anchor="t">
+          <a:bodyPr wrap="square" lIns="0" tIns="0" rIns="0" bIns="0" anchor="t">
             <a:spAutoFit/>
           </a:bodyPr>
           <a:lstStyle/>
@@ -9033,6 +8556,7 @@
           <a:lstStyle/>
           <a:p>
             <a:pPr algn="ctr"/>
+            <a:endParaRPr/>
           </a:p>
         </p:txBody>
       </p:sp>
@@ -9053,7 +8577,7 @@
           <a:noFill/>
         </p:spPr>
         <p:txBody>
-          <a:bodyPr wrap="square" lIns="0" rIns="0" tIns="0" bIns="0" anchor="t">
+          <a:bodyPr wrap="square" lIns="0" tIns="0" rIns="0" bIns="0" anchor="t">
             <a:spAutoFit/>
           </a:bodyPr>
           <a:lstStyle/>
@@ -9092,7 +8616,7 @@
           <a:noFill/>
         </p:spPr>
         <p:txBody>
-          <a:bodyPr wrap="square" lIns="0" rIns="0" tIns="0" bIns="0" anchor="t">
+          <a:bodyPr wrap="square" lIns="0" tIns="0" rIns="0" bIns="0" anchor="t">
             <a:spAutoFit/>
           </a:bodyPr>
           <a:lstStyle/>
@@ -9213,6 +8737,7 @@
           <a:lstStyle/>
           <a:p>
             <a:pPr algn="ctr"/>
+            <a:endParaRPr/>
           </a:p>
         </p:txBody>
       </p:sp>
@@ -9233,7 +8758,7 @@
           <a:noFill/>
         </p:spPr>
         <p:txBody>
-          <a:bodyPr wrap="square" lIns="0" rIns="0" tIns="0" bIns="0" anchor="t">
+          <a:bodyPr wrap="square" lIns="0" tIns="0" rIns="0" bIns="0" anchor="t">
             <a:spAutoFit/>
           </a:bodyPr>
           <a:lstStyle/>
@@ -9272,7 +8797,7 @@
           <a:noFill/>
         </p:spPr>
         <p:txBody>
-          <a:bodyPr wrap="square" lIns="0" rIns="0" tIns="0" bIns="0" anchor="t">
+          <a:bodyPr wrap="square" lIns="0" tIns="0" rIns="0" bIns="0" anchor="t">
             <a:spAutoFit/>
           </a:bodyPr>
           <a:lstStyle/>
@@ -9389,7 +8914,7 @@
           <a:noFill/>
         </p:spPr>
         <p:txBody>
-          <a:bodyPr wrap="square" lIns="0" rIns="0" tIns="0" bIns="0" anchor="t">
+          <a:bodyPr wrap="square" lIns="0" tIns="0" rIns="0" bIns="0" anchor="t">
             <a:spAutoFit/>
           </a:bodyPr>
           <a:lstStyle/>
@@ -9420,7 +8945,7 @@
 </file>
 
 <file path=ppt/slides/slide5.xml><?xml version="1.0" encoding="utf-8"?>
-<p:sld xmlns:a="http://schemas.openxmlformats.org/drawingml/2006/main" xmlns:p="http://schemas.openxmlformats.org/presentationml/2006/main" xmlns:r="http://schemas.openxmlformats.org/officeDocument/2006/relationships">
+<p:sld xmlns:a="http://schemas.openxmlformats.org/drawingml/2006/main" xmlns:r="http://schemas.openxmlformats.org/officeDocument/2006/relationships" xmlns:p="http://schemas.openxmlformats.org/presentationml/2006/main">
   <p:cSld>
     <p:spTree>
       <p:nvGrpSpPr>
@@ -9428,7 +8953,14 @@
         <p:cNvGrpSpPr/>
         <p:nvPr/>
       </p:nvGrpSpPr>
-      <p:grpSpPr/>
+      <p:grpSpPr>
+        <a:xfrm>
+          <a:off x="0" y="0"/>
+          <a:ext cx="0" cy="0"/>
+          <a:chOff x="0" y="0"/>
+          <a:chExt cx="0" cy="0"/>
+        </a:xfrm>
+      </p:grpSpPr>
       <p:sp>
         <p:nvSpPr>
           <p:cNvPr id="2" name="Rectangle 1"/>
@@ -9470,6 +9002,7 @@
           <a:lstStyle/>
           <a:p>
             <a:pPr algn="ctr"/>
+            <a:endParaRPr/>
           </a:p>
         </p:txBody>
       </p:sp>
@@ -9490,7 +9023,7 @@
           <a:noFill/>
         </p:spPr>
         <p:txBody>
-          <a:bodyPr wrap="square" lIns="0" rIns="0" tIns="0" bIns="0" anchor="t">
+          <a:bodyPr wrap="square" lIns="0" tIns="0" rIns="0" bIns="0" anchor="t">
             <a:spAutoFit/>
           </a:bodyPr>
           <a:lstStyle/>
@@ -9529,7 +9062,7 @@
           <a:noFill/>
         </p:spPr>
         <p:txBody>
-          <a:bodyPr wrap="square" lIns="0" rIns="0" tIns="0" bIns="0" anchor="t">
+          <a:bodyPr wrap="square" lIns="0" tIns="0" rIns="0" bIns="0" anchor="t">
             <a:spAutoFit/>
           </a:bodyPr>
           <a:lstStyle/>
@@ -9568,7 +9101,7 @@
           <a:noFill/>
         </p:spPr>
         <p:txBody>
-          <a:bodyPr wrap="square" lIns="0" rIns="0" tIns="0" bIns="0" anchor="t">
+          <a:bodyPr wrap="square" lIns="0" tIns="0" rIns="0" bIns="0" anchor="t">
             <a:spAutoFit/>
           </a:bodyPr>
           <a:lstStyle/>
@@ -9599,7 +9132,7 @@
         <p:spPr>
           <a:xfrm>
             <a:off x="0" y="3291840"/>
-            <a:ext cx="18288000" cy="4023360"/>
+            <a:ext cx="18288000" cy="4924425"/>
           </a:xfrm>
           <a:prstGeom prst="rect">
             <a:avLst/>
@@ -9607,7 +9140,7 @@
           <a:noFill/>
         </p:spPr>
         <p:txBody>
-          <a:bodyPr wrap="square" lIns="0" rIns="0" tIns="0" bIns="0" anchor="t">
+          <a:bodyPr wrap="square" lIns="0" tIns="0" rIns="0" bIns="0" anchor="t">
             <a:spAutoFit/>
           </a:bodyPr>
           <a:lstStyle/>
@@ -9618,7 +9151,7 @@
               </a:lnSpc>
             </a:pPr>
             <a:r>
-              <a:rPr sz="42000" b="1">
+              <a:rPr sz="32000" b="1" dirty="0">
                 <a:solidFill>
                   <a:srgbClr val="FFFFFF"/>
                 </a:solidFill>
@@ -9646,7 +9179,7 @@
           <a:noFill/>
         </p:spPr>
         <p:txBody>
-          <a:bodyPr wrap="square" lIns="0" rIns="0" tIns="0" bIns="0" anchor="t">
+          <a:bodyPr wrap="square" lIns="0" tIns="0" rIns="0" bIns="0" anchor="t">
             <a:spAutoFit/>
           </a:bodyPr>
           <a:lstStyle/>
@@ -9708,6 +9241,7 @@
           <a:lstStyle/>
           <a:p>
             <a:pPr algn="ctr"/>
+            <a:endParaRPr/>
           </a:p>
         </p:txBody>
       </p:sp>
@@ -9720,7 +9254,7 @@
 </file>
 
 <file path=ppt/slides/slide6.xml><?xml version="1.0" encoding="utf-8"?>
-<p:sld xmlns:a="http://schemas.openxmlformats.org/drawingml/2006/main" xmlns:p="http://schemas.openxmlformats.org/presentationml/2006/main" xmlns:r="http://schemas.openxmlformats.org/officeDocument/2006/relationships">
+<p:sld xmlns:a="http://schemas.openxmlformats.org/drawingml/2006/main" xmlns:r="http://schemas.openxmlformats.org/officeDocument/2006/relationships" xmlns:p="http://schemas.openxmlformats.org/presentationml/2006/main">
   <p:cSld>
     <p:spTree>
       <p:nvGrpSpPr>
@@ -9728,7 +9262,14 @@
         <p:cNvGrpSpPr/>
         <p:nvPr/>
       </p:nvGrpSpPr>
-      <p:grpSpPr/>
+      <p:grpSpPr>
+        <a:xfrm>
+          <a:off x="0" y="0"/>
+          <a:ext cx="0" cy="0"/>
+          <a:chOff x="0" y="0"/>
+          <a:chExt cx="0" cy="0"/>
+        </a:xfrm>
+      </p:grpSpPr>
       <p:sp>
         <p:nvSpPr>
           <p:cNvPr id="2" name="Rectangle 1"/>
@@ -9770,6 +9311,7 @@
           <a:lstStyle/>
           <a:p>
             <a:pPr algn="ctr"/>
+            <a:endParaRPr/>
           </a:p>
         </p:txBody>
       </p:sp>
@@ -9790,7 +9332,7 @@
           <a:noFill/>
         </p:spPr>
         <p:txBody>
-          <a:bodyPr wrap="square" lIns="0" rIns="0" tIns="0" bIns="0" anchor="t">
+          <a:bodyPr wrap="square" lIns="0" tIns="0" rIns="0" bIns="0" anchor="t">
             <a:spAutoFit/>
           </a:bodyPr>
           <a:lstStyle/>
@@ -9829,7 +9371,7 @@
           <a:noFill/>
         </p:spPr>
         <p:txBody>
-          <a:bodyPr wrap="square" lIns="0" rIns="0" tIns="0" bIns="0" anchor="t">
+          <a:bodyPr wrap="square" lIns="0" tIns="0" rIns="0" bIns="0" anchor="t">
             <a:spAutoFit/>
           </a:bodyPr>
           <a:lstStyle/>
@@ -9868,7 +9410,7 @@
           <a:noFill/>
         </p:spPr>
         <p:txBody>
-          <a:bodyPr wrap="square" lIns="0" rIns="0" tIns="0" bIns="0" anchor="t">
+          <a:bodyPr wrap="square" lIns="0" tIns="0" rIns="0" bIns="0" anchor="t">
             <a:spAutoFit/>
           </a:bodyPr>
           <a:lstStyle/>
@@ -9899,7 +9441,7 @@
         <p:spPr>
           <a:xfrm>
             <a:off x="0" y="3291840"/>
-            <a:ext cx="18288000" cy="4023360"/>
+            <a:ext cx="18288000" cy="4924425"/>
           </a:xfrm>
           <a:prstGeom prst="rect">
             <a:avLst/>
@@ -9907,7 +9449,7 @@
           <a:noFill/>
         </p:spPr>
         <p:txBody>
-          <a:bodyPr wrap="square" lIns="0" rIns="0" tIns="0" bIns="0" anchor="t">
+          <a:bodyPr wrap="square" lIns="0" tIns="0" rIns="0" bIns="0" anchor="t">
             <a:spAutoFit/>
           </a:bodyPr>
           <a:lstStyle/>
@@ -9918,7 +9460,7 @@
               </a:lnSpc>
             </a:pPr>
             <a:r>
-              <a:rPr sz="42000" b="1">
+              <a:rPr sz="32000" b="1" dirty="0">
                 <a:solidFill>
                   <a:srgbClr val="FFFFFF"/>
                 </a:solidFill>
@@ -9946,7 +9488,7 @@
           <a:noFill/>
         </p:spPr>
         <p:txBody>
-          <a:bodyPr wrap="square" lIns="0" rIns="0" tIns="0" bIns="0" anchor="t">
+          <a:bodyPr wrap="square" lIns="0" tIns="0" rIns="0" bIns="0" anchor="t">
             <a:spAutoFit/>
           </a:bodyPr>
           <a:lstStyle/>
@@ -10008,6 +9550,7 @@
           <a:lstStyle/>
           <a:p>
             <a:pPr algn="ctr"/>
+            <a:endParaRPr/>
           </a:p>
         </p:txBody>
       </p:sp>
@@ -10020,7 +9563,7 @@
 </file>
 
 <file path=ppt/slides/slide7.xml><?xml version="1.0" encoding="utf-8"?>
-<p:sld xmlns:a="http://schemas.openxmlformats.org/drawingml/2006/main" xmlns:p="http://schemas.openxmlformats.org/presentationml/2006/main" xmlns:r="http://schemas.openxmlformats.org/officeDocument/2006/relationships">
+<p:sld xmlns:a="http://schemas.openxmlformats.org/drawingml/2006/main" xmlns:r="http://schemas.openxmlformats.org/officeDocument/2006/relationships" xmlns:p="http://schemas.openxmlformats.org/presentationml/2006/main">
   <p:cSld>
     <p:spTree>
       <p:nvGrpSpPr>
@@ -10028,7 +9571,14 @@
         <p:cNvGrpSpPr/>
         <p:nvPr/>
       </p:nvGrpSpPr>
-      <p:grpSpPr/>
+      <p:grpSpPr>
+        <a:xfrm>
+          <a:off x="0" y="0"/>
+          <a:ext cx="0" cy="0"/>
+          <a:chOff x="0" y="0"/>
+          <a:chExt cx="0" cy="0"/>
+        </a:xfrm>
+      </p:grpSpPr>
       <p:sp>
         <p:nvSpPr>
           <p:cNvPr id="2" name="Rectangle 1"/>
@@ -10070,6 +9620,7 @@
           <a:lstStyle/>
           <a:p>
             <a:pPr algn="ctr"/>
+            <a:endParaRPr/>
           </a:p>
         </p:txBody>
       </p:sp>
@@ -10090,7 +9641,7 @@
           <a:noFill/>
         </p:spPr>
         <p:txBody>
-          <a:bodyPr wrap="square" lIns="0" rIns="0" tIns="0" bIns="0" anchor="t">
+          <a:bodyPr wrap="square" lIns="0" tIns="0" rIns="0" bIns="0" anchor="t">
             <a:spAutoFit/>
           </a:bodyPr>
           <a:lstStyle/>
@@ -10129,7 +9680,7 @@
           <a:noFill/>
         </p:spPr>
         <p:txBody>
-          <a:bodyPr wrap="square" lIns="0" rIns="0" tIns="0" bIns="0" anchor="t">
+          <a:bodyPr wrap="square" lIns="0" tIns="0" rIns="0" bIns="0" anchor="t">
             <a:spAutoFit/>
           </a:bodyPr>
           <a:lstStyle/>
@@ -10168,7 +9719,7 @@
           <a:noFill/>
         </p:spPr>
         <p:txBody>
-          <a:bodyPr wrap="square" lIns="0" rIns="0" tIns="0" bIns="0" anchor="t">
+          <a:bodyPr wrap="square" lIns="0" tIns="0" rIns="0" bIns="0" anchor="t">
             <a:spAutoFit/>
           </a:bodyPr>
           <a:lstStyle/>
@@ -10207,7 +9758,7 @@
           <a:noFill/>
         </p:spPr>
         <p:txBody>
-          <a:bodyPr wrap="square" lIns="0" rIns="0" tIns="0" bIns="0" anchor="t">
+          <a:bodyPr wrap="square" lIns="0" tIns="0" rIns="0" bIns="0" anchor="t">
             <a:spAutoFit/>
           </a:bodyPr>
           <a:lstStyle/>
@@ -10269,6 +9820,7 @@
           <a:lstStyle/>
           <a:p>
             <a:pPr algn="ctr"/>
+            <a:endParaRPr/>
           </a:p>
         </p:txBody>
       </p:sp>
@@ -10312,6 +9864,7 @@
           <a:lstStyle/>
           <a:p>
             <a:pPr algn="ctr"/>
+            <a:endParaRPr/>
           </a:p>
         </p:txBody>
       </p:sp>
@@ -10332,7 +9885,7 @@
           <a:noFill/>
         </p:spPr>
         <p:txBody>
-          <a:bodyPr wrap="square" lIns="0" rIns="0" tIns="0" bIns="0" anchor="ctr">
+          <a:bodyPr wrap="square" lIns="0" tIns="0" rIns="0" bIns="0" anchor="ctr">
             <a:spAutoFit/>
           </a:bodyPr>
           <a:lstStyle/>
@@ -10371,7 +9924,7 @@
           <a:noFill/>
         </p:spPr>
         <p:txBody>
-          <a:bodyPr wrap="square" lIns="0" rIns="0" tIns="0" bIns="0" anchor="ctr">
+          <a:bodyPr wrap="square" lIns="0" tIns="0" rIns="0" bIns="0" anchor="ctr">
             <a:spAutoFit/>
           </a:bodyPr>
           <a:lstStyle/>
@@ -10433,6 +9986,7 @@
           <a:lstStyle/>
           <a:p>
             <a:pPr algn="ctr"/>
+            <a:endParaRPr/>
           </a:p>
         </p:txBody>
       </p:sp>
@@ -10476,6 +10030,7 @@
           <a:lstStyle/>
           <a:p>
             <a:pPr algn="ctr"/>
+            <a:endParaRPr/>
           </a:p>
         </p:txBody>
       </p:sp>
@@ -10496,7 +10051,7 @@
           <a:noFill/>
         </p:spPr>
         <p:txBody>
-          <a:bodyPr wrap="square" lIns="0" rIns="0" tIns="0" bIns="0" anchor="ctr">
+          <a:bodyPr wrap="square" lIns="0" tIns="0" rIns="0" bIns="0" anchor="ctr">
             <a:spAutoFit/>
           </a:bodyPr>
           <a:lstStyle/>
@@ -10535,7 +10090,7 @@
           <a:noFill/>
         </p:spPr>
         <p:txBody>
-          <a:bodyPr wrap="square" lIns="0" rIns="0" tIns="0" bIns="0" anchor="ctr">
+          <a:bodyPr wrap="square" lIns="0" tIns="0" rIns="0" bIns="0" anchor="ctr">
             <a:spAutoFit/>
           </a:bodyPr>
           <a:lstStyle/>
@@ -10597,6 +10152,7 @@
           <a:lstStyle/>
           <a:p>
             <a:pPr algn="ctr"/>
+            <a:endParaRPr/>
           </a:p>
         </p:txBody>
       </p:sp>
@@ -10640,6 +10196,7 @@
           <a:lstStyle/>
           <a:p>
             <a:pPr algn="ctr"/>
+            <a:endParaRPr/>
           </a:p>
         </p:txBody>
       </p:sp>
@@ -10660,7 +10217,7 @@
           <a:noFill/>
         </p:spPr>
         <p:txBody>
-          <a:bodyPr wrap="square" lIns="0" rIns="0" tIns="0" bIns="0" anchor="ctr">
+          <a:bodyPr wrap="square" lIns="0" tIns="0" rIns="0" bIns="0" anchor="ctr">
             <a:spAutoFit/>
           </a:bodyPr>
           <a:lstStyle/>
@@ -10699,7 +10256,7 @@
           <a:noFill/>
         </p:spPr>
         <p:txBody>
-          <a:bodyPr wrap="square" lIns="0" rIns="0" tIns="0" bIns="0" anchor="ctr">
+          <a:bodyPr wrap="square" lIns="0" tIns="0" rIns="0" bIns="0" anchor="ctr">
             <a:spAutoFit/>
           </a:bodyPr>
           <a:lstStyle/>
@@ -10761,6 +10318,7 @@
           <a:lstStyle/>
           <a:p>
             <a:pPr algn="ctr"/>
+            <a:endParaRPr/>
           </a:p>
         </p:txBody>
       </p:sp>
@@ -10804,6 +10362,7 @@
           <a:lstStyle/>
           <a:p>
             <a:pPr algn="ctr"/>
+            <a:endParaRPr/>
           </a:p>
         </p:txBody>
       </p:sp>
@@ -10824,7 +10383,7 @@
           <a:noFill/>
         </p:spPr>
         <p:txBody>
-          <a:bodyPr wrap="square" lIns="0" rIns="0" tIns="0" bIns="0" anchor="ctr">
+          <a:bodyPr wrap="square" lIns="0" tIns="0" rIns="0" bIns="0" anchor="ctr">
             <a:spAutoFit/>
           </a:bodyPr>
           <a:lstStyle/>
@@ -10863,7 +10422,7 @@
           <a:noFill/>
         </p:spPr>
         <p:txBody>
-          <a:bodyPr wrap="square" lIns="0" rIns="0" tIns="0" bIns="0" anchor="ctr">
+          <a:bodyPr wrap="square" lIns="0" tIns="0" rIns="0" bIns="0" anchor="ctr">
             <a:spAutoFit/>
           </a:bodyPr>
           <a:lstStyle/>
@@ -10921,7 +10480,7 @@
           </a:fontRef>
         </p:style>
         <p:txBody>
-          <a:bodyPr rtlCol="0" anchor="ctr" lIns="109728" rIns="109728" tIns="18288" bIns="18288"/>
+          <a:bodyPr lIns="109728" tIns="18288" rIns="109728" bIns="18288" rtlCol="0" anchor="ctr"/>
           <a:lstStyle/>
           <a:p>
             <a:pPr algn="ctr"/>
@@ -10977,6 +10536,7 @@
           <a:lstStyle/>
           <a:p>
             <a:pPr algn="ctr"/>
+            <a:endParaRPr/>
           </a:p>
         </p:txBody>
       </p:sp>
@@ -11020,6 +10580,7 @@
           <a:lstStyle/>
           <a:p>
             <a:pPr algn="ctr"/>
+            <a:endParaRPr/>
           </a:p>
         </p:txBody>
       </p:sp>
@@ -11040,7 +10601,7 @@
           <a:noFill/>
         </p:spPr>
         <p:txBody>
-          <a:bodyPr wrap="square" lIns="0" rIns="0" tIns="0" bIns="0" anchor="ctr">
+          <a:bodyPr wrap="square" lIns="0" tIns="0" rIns="0" bIns="0" anchor="ctr">
             <a:spAutoFit/>
           </a:bodyPr>
           <a:lstStyle/>
@@ -11079,7 +10640,7 @@
           <a:noFill/>
         </p:spPr>
         <p:txBody>
-          <a:bodyPr wrap="square" lIns="0" rIns="0" tIns="0" bIns="0" anchor="ctr">
+          <a:bodyPr wrap="square" lIns="0" tIns="0" rIns="0" bIns="0" anchor="ctr">
             <a:spAutoFit/>
           </a:bodyPr>
           <a:lstStyle/>
@@ -11118,7 +10679,7 @@
           <a:noFill/>
         </p:spPr>
         <p:txBody>
-          <a:bodyPr wrap="square" lIns="0" rIns="0" tIns="0" bIns="0" anchor="t">
+          <a:bodyPr wrap="square" lIns="0" tIns="0" rIns="0" bIns="0" anchor="t">
             <a:spAutoFit/>
           </a:bodyPr>
           <a:lstStyle/>
@@ -11149,7 +10710,7 @@
 </file>
 
 <file path=ppt/slides/slide8.xml><?xml version="1.0" encoding="utf-8"?>
-<p:sld xmlns:a="http://schemas.openxmlformats.org/drawingml/2006/main" xmlns:p="http://schemas.openxmlformats.org/presentationml/2006/main" xmlns:r="http://schemas.openxmlformats.org/officeDocument/2006/relationships">
+<p:sld xmlns:a="http://schemas.openxmlformats.org/drawingml/2006/main" xmlns:r="http://schemas.openxmlformats.org/officeDocument/2006/relationships" xmlns:p="http://schemas.openxmlformats.org/presentationml/2006/main">
   <p:cSld>
     <p:spTree>
       <p:nvGrpSpPr>
@@ -11157,7 +10718,14 @@
         <p:cNvGrpSpPr/>
         <p:nvPr/>
       </p:nvGrpSpPr>
-      <p:grpSpPr/>
+      <p:grpSpPr>
+        <a:xfrm>
+          <a:off x="0" y="0"/>
+          <a:ext cx="0" cy="0"/>
+          <a:chOff x="0" y="0"/>
+          <a:chExt cx="0" cy="0"/>
+        </a:xfrm>
+      </p:grpSpPr>
       <p:sp>
         <p:nvSpPr>
           <p:cNvPr id="2" name="Rectangle 1"/>
@@ -11199,6 +10767,7 @@
           <a:lstStyle/>
           <a:p>
             <a:pPr algn="ctr"/>
+            <a:endParaRPr/>
           </a:p>
         </p:txBody>
       </p:sp>
@@ -11219,7 +10788,7 @@
           <a:noFill/>
         </p:spPr>
         <p:txBody>
-          <a:bodyPr wrap="square" lIns="0" rIns="0" tIns="0" bIns="0" anchor="t">
+          <a:bodyPr wrap="square" lIns="0" tIns="0" rIns="0" bIns="0" anchor="t">
             <a:spAutoFit/>
           </a:bodyPr>
           <a:lstStyle/>
@@ -11258,7 +10827,7 @@
           <a:noFill/>
         </p:spPr>
         <p:txBody>
-          <a:bodyPr wrap="square" lIns="0" rIns="0" tIns="0" bIns="0" anchor="t">
+          <a:bodyPr wrap="square" lIns="0" tIns="0" rIns="0" bIns="0" anchor="t">
             <a:spAutoFit/>
           </a:bodyPr>
           <a:lstStyle/>
@@ -11297,7 +10866,7 @@
           <a:noFill/>
         </p:spPr>
         <p:txBody>
-          <a:bodyPr wrap="square" lIns="0" rIns="0" tIns="0" bIns="0" anchor="t">
+          <a:bodyPr wrap="square" lIns="0" tIns="0" rIns="0" bIns="0" anchor="t">
             <a:spAutoFit/>
           </a:bodyPr>
           <a:lstStyle/>
@@ -11328,7 +10897,7 @@
         <p:spPr>
           <a:xfrm>
             <a:off x="0" y="3291840"/>
-            <a:ext cx="18288000" cy="4023360"/>
+            <a:ext cx="18288000" cy="4616648"/>
           </a:xfrm>
           <a:prstGeom prst="rect">
             <a:avLst/>
@@ -11336,7 +10905,7 @@
           <a:noFill/>
         </p:spPr>
         <p:txBody>
-          <a:bodyPr wrap="square" lIns="0" rIns="0" tIns="0" bIns="0" anchor="t">
+          <a:bodyPr wrap="square" lIns="0" tIns="0" rIns="0" bIns="0" anchor="t">
             <a:spAutoFit/>
           </a:bodyPr>
           <a:lstStyle/>
@@ -11347,7 +10916,7 @@
               </a:lnSpc>
             </a:pPr>
             <a:r>
-              <a:rPr sz="42000" b="1">
+              <a:rPr sz="30000" b="1" dirty="0">
                 <a:solidFill>
                   <a:srgbClr val="FFFFFF"/>
                 </a:solidFill>
@@ -11375,7 +10944,7 @@
           <a:noFill/>
         </p:spPr>
         <p:txBody>
-          <a:bodyPr wrap="square" lIns="0" rIns="0" tIns="0" bIns="0" anchor="t">
+          <a:bodyPr wrap="square" lIns="0" tIns="0" rIns="0" bIns="0" anchor="t">
             <a:spAutoFit/>
           </a:bodyPr>
           <a:lstStyle/>
@@ -11437,6 +11006,7 @@
           <a:lstStyle/>
           <a:p>
             <a:pPr algn="ctr"/>
+            <a:endParaRPr/>
           </a:p>
         </p:txBody>
       </p:sp>
@@ -11449,7 +11019,7 @@
 </file>
 
 <file path=ppt/slides/slide9.xml><?xml version="1.0" encoding="utf-8"?>
-<p:sld xmlns:a="http://schemas.openxmlformats.org/drawingml/2006/main" xmlns:p="http://schemas.openxmlformats.org/presentationml/2006/main" xmlns:r="http://schemas.openxmlformats.org/officeDocument/2006/relationships">
+<p:sld xmlns:a="http://schemas.openxmlformats.org/drawingml/2006/main" xmlns:r="http://schemas.openxmlformats.org/officeDocument/2006/relationships" xmlns:p="http://schemas.openxmlformats.org/presentationml/2006/main">
   <p:cSld>
     <p:spTree>
       <p:nvGrpSpPr>
@@ -11457,7 +11027,14 @@
         <p:cNvGrpSpPr/>
         <p:nvPr/>
       </p:nvGrpSpPr>
-      <p:grpSpPr/>
+      <p:grpSpPr>
+        <a:xfrm>
+          <a:off x="0" y="0"/>
+          <a:ext cx="0" cy="0"/>
+          <a:chOff x="0" y="0"/>
+          <a:chExt cx="0" cy="0"/>
+        </a:xfrm>
+      </p:grpSpPr>
       <p:sp>
         <p:nvSpPr>
           <p:cNvPr id="2" name="Rectangle 1"/>
@@ -11499,6 +11076,7 @@
           <a:lstStyle/>
           <a:p>
             <a:pPr algn="ctr"/>
+            <a:endParaRPr/>
           </a:p>
         </p:txBody>
       </p:sp>
@@ -11519,7 +11097,7 @@
           <a:noFill/>
         </p:spPr>
         <p:txBody>
-          <a:bodyPr wrap="square" lIns="0" rIns="0" tIns="0" bIns="0" anchor="t">
+          <a:bodyPr wrap="square" lIns="0" tIns="0" rIns="0" bIns="0" anchor="t">
             <a:spAutoFit/>
           </a:bodyPr>
           <a:lstStyle/>
@@ -11558,7 +11136,7 @@
           <a:noFill/>
         </p:spPr>
         <p:txBody>
-          <a:bodyPr wrap="square" lIns="0" rIns="0" tIns="0" bIns="0" anchor="t">
+          <a:bodyPr wrap="square" lIns="0" tIns="0" rIns="0" bIns="0" anchor="t">
             <a:spAutoFit/>
           </a:bodyPr>
           <a:lstStyle/>
@@ -11597,7 +11175,7 @@
           <a:noFill/>
         </p:spPr>
         <p:txBody>
-          <a:bodyPr wrap="square" lIns="0" rIns="0" tIns="0" bIns="0" anchor="t">
+          <a:bodyPr wrap="square" lIns="0" tIns="0" rIns="0" bIns="0" anchor="t">
             <a:spAutoFit/>
           </a:bodyPr>
           <a:lstStyle/>
@@ -11636,7 +11214,7 @@
           <a:noFill/>
         </p:spPr>
         <p:txBody>
-          <a:bodyPr wrap="square" lIns="0" rIns="0" tIns="0" bIns="0" anchor="t">
+          <a:bodyPr wrap="square" lIns="0" tIns="0" rIns="0" bIns="0" anchor="t">
             <a:spAutoFit/>
           </a:bodyPr>
           <a:lstStyle/>
@@ -11698,6 +11276,7 @@
           <a:lstStyle/>
           <a:p>
             <a:pPr algn="ctr"/>
+            <a:endParaRPr/>
           </a:p>
         </p:txBody>
       </p:sp>
@@ -11718,7 +11297,7 @@
           <a:noFill/>
         </p:spPr>
         <p:txBody>
-          <a:bodyPr wrap="square" lIns="0" rIns="0" tIns="0" bIns="0" anchor="t">
+          <a:bodyPr wrap="square" lIns="0" tIns="0" rIns="0" bIns="0" anchor="t">
             <a:spAutoFit/>
           </a:bodyPr>
           <a:lstStyle/>
@@ -11757,7 +11336,7 @@
           <a:noFill/>
         </p:spPr>
         <p:txBody>
-          <a:bodyPr wrap="square" lIns="0" rIns="0" tIns="0" bIns="0" anchor="t">
+          <a:bodyPr wrap="square" lIns="0" tIns="0" rIns="0" bIns="0" anchor="t">
             <a:spAutoFit/>
           </a:bodyPr>
           <a:lstStyle/>
@@ -11814,7 +11393,7 @@
           <a:noFill/>
         </p:spPr>
         <p:txBody>
-          <a:bodyPr wrap="square" lIns="0" rIns="0" tIns="0" bIns="0" anchor="t">
+          <a:bodyPr wrap="square" lIns="0" tIns="0" rIns="0" bIns="0" anchor="t">
             <a:spAutoFit/>
           </a:bodyPr>
           <a:lstStyle/>
@@ -11853,7 +11432,7 @@
           <a:noFill/>
         </p:spPr>
         <p:txBody>
-          <a:bodyPr wrap="square" lIns="0" rIns="0" tIns="0" bIns="0" anchor="t">
+          <a:bodyPr wrap="square" lIns="0" tIns="0" rIns="0" bIns="0" anchor="t">
             <a:spAutoFit/>
           </a:bodyPr>
           <a:lstStyle/>
@@ -11926,7 +11505,7 @@
           <a:noFill/>
         </p:spPr>
         <p:txBody>
-          <a:bodyPr wrap="square" lIns="0" rIns="0" tIns="0" bIns="0" anchor="t">
+          <a:bodyPr wrap="square" lIns="0" tIns="0" rIns="0" bIns="0" anchor="t">
             <a:spAutoFit/>
           </a:bodyPr>
           <a:lstStyle/>
@@ -12287,44 +11866,44 @@
         <a:sysClr val="window" lastClr="FFFFFF"/>
       </a:lt1>
       <a:dk2>
-        <a:srgbClr val="1F497D"/>
+        <a:srgbClr val="0E2841"/>
       </a:dk2>
       <a:lt2>
-        <a:srgbClr val="EEECE1"/>
+        <a:srgbClr val="E8E8E8"/>
       </a:lt2>
       <a:accent1>
-        <a:srgbClr val="4F81BD"/>
+        <a:srgbClr val="156082"/>
       </a:accent1>
       <a:accent2>
-        <a:srgbClr val="C0504D"/>
+        <a:srgbClr val="E97132"/>
       </a:accent2>
       <a:accent3>
-        <a:srgbClr val="9BBB59"/>
+        <a:srgbClr val="196B24"/>
       </a:accent3>
       <a:accent4>
-        <a:srgbClr val="8064A2"/>
+        <a:srgbClr val="0F9ED5"/>
       </a:accent4>
       <a:accent5>
-        <a:srgbClr val="4BACC6"/>
+        <a:srgbClr val="A02B93"/>
       </a:accent5>
       <a:accent6>
-        <a:srgbClr val="F79646"/>
+        <a:srgbClr val="4EA72E"/>
       </a:accent6>
       <a:hlink>
-        <a:srgbClr val="0000FF"/>
+        <a:srgbClr val="467886"/>
       </a:hlink>
       <a:folHlink>
-        <a:srgbClr val="800080"/>
+        <a:srgbClr val="96607D"/>
       </a:folHlink>
     </a:clrScheme>
     <a:fontScheme name="Office">
       <a:majorFont>
-        <a:latin typeface="Calibri"/>
+        <a:latin typeface="Aptos Display" panose="02110004020202020204"/>
         <a:ea typeface=""/>
         <a:cs typeface=""/>
-        <a:font script="Jpan" typeface="ＭＳ Ｐゴシック"/>
+        <a:font script="Jpan" typeface="游ゴシック Light"/>
         <a:font script="Hang" typeface="맑은 고딕"/>
-        <a:font script="Hans" typeface="宋体"/>
+        <a:font script="Hans" typeface="等线 Light"/>
         <a:font script="Hant" typeface="新細明體"/>
         <a:font script="Arab" typeface="Times New Roman"/>
         <a:font script="Hebr" typeface="Times New Roman"/>
@@ -12352,14 +11931,31 @@
         <a:font script="Viet" typeface="Times New Roman"/>
         <a:font script="Uigh" typeface="Microsoft Uighur"/>
         <a:font script="Geor" typeface="Sylfaen"/>
+        <a:font script="Armn" typeface="Arial"/>
+        <a:font script="Bugi" typeface="Leelawadee UI"/>
+        <a:font script="Bopo" typeface="Microsoft JhengHei"/>
+        <a:font script="Java" typeface="Javanese Text"/>
+        <a:font script="Lisu" typeface="Segoe UI"/>
+        <a:font script="Mymr" typeface="Myanmar Text"/>
+        <a:font script="Nkoo" typeface="Ebrima"/>
+        <a:font script="Olck" typeface="Nirmala UI"/>
+        <a:font script="Osma" typeface="Ebrima"/>
+        <a:font script="Phag" typeface="Phagspa"/>
+        <a:font script="Syrn" typeface="Estrangelo Edessa"/>
+        <a:font script="Syrj" typeface="Estrangelo Edessa"/>
+        <a:font script="Syre" typeface="Estrangelo Edessa"/>
+        <a:font script="Sora" typeface="Nirmala UI"/>
+        <a:font script="Tale" typeface="Microsoft Tai Le"/>
+        <a:font script="Talu" typeface="Microsoft New Tai Lue"/>
+        <a:font script="Tfng" typeface="Ebrima"/>
       </a:majorFont>
       <a:minorFont>
-        <a:latin typeface="Calibri"/>
+        <a:latin typeface="Aptos" panose="02110004020202020204"/>
         <a:ea typeface=""/>
         <a:cs typeface=""/>
-        <a:font script="Jpan" typeface="ＭＳ Ｐゴシック"/>
+        <a:font script="Jpan" typeface="游ゴシック"/>
         <a:font script="Hang" typeface="맑은 고딕"/>
-        <a:font script="Hans" typeface="宋体"/>
+        <a:font script="Hans" typeface="等线"/>
         <a:font script="Hant" typeface="新細明體"/>
         <a:font script="Arab" typeface="Arial"/>
         <a:font script="Hebr" typeface="Arial"/>
@@ -12387,6 +11983,23 @@
         <a:font script="Viet" typeface="Arial"/>
         <a:font script="Uigh" typeface="Microsoft Uighur"/>
         <a:font script="Geor" typeface="Sylfaen"/>
+        <a:font script="Armn" typeface="Arial"/>
+        <a:font script="Bugi" typeface="Leelawadee UI"/>
+        <a:font script="Bopo" typeface="Microsoft JhengHei"/>
+        <a:font script="Java" typeface="Javanese Text"/>
+        <a:font script="Lisu" typeface="Segoe UI"/>
+        <a:font script="Mymr" typeface="Myanmar Text"/>
+        <a:font script="Nkoo" typeface="Ebrima"/>
+        <a:font script="Olck" typeface="Nirmala UI"/>
+        <a:font script="Osma" typeface="Ebrima"/>
+        <a:font script="Phag" typeface="Phagspa"/>
+        <a:font script="Syrn" typeface="Estrangelo Edessa"/>
+        <a:font script="Syrj" typeface="Estrangelo Edessa"/>
+        <a:font script="Syre" typeface="Estrangelo Edessa"/>
+        <a:font script="Sora" typeface="Nirmala UI"/>
+        <a:font script="Tale" typeface="Microsoft Tai Le"/>
+        <a:font script="Talu" typeface="Microsoft New Tai Lue"/>
+        <a:font script="Tfng" typeface="Ebrima"/>
       </a:minorFont>
     </a:fontScheme>
     <a:fmtScheme name="Office">
@@ -12398,180 +12011,136 @@
           <a:gsLst>
             <a:gs pos="0">
               <a:schemeClr val="phClr">
-                <a:tint val="50000"/>
-                <a:satMod val="300000"/>
+                <a:lumMod val="110000"/>
+                <a:satMod val="105000"/>
+                <a:tint val="67000"/>
               </a:schemeClr>
             </a:gs>
-            <a:gs pos="35000">
+            <a:gs pos="50000">
               <a:schemeClr val="phClr">
-                <a:tint val="37000"/>
-                <a:satMod val="300000"/>
+                <a:lumMod val="105000"/>
+                <a:satMod val="103000"/>
+                <a:tint val="73000"/>
               </a:schemeClr>
             </a:gs>
             <a:gs pos="100000">
               <a:schemeClr val="phClr">
-                <a:tint val="15000"/>
-                <a:satMod val="350000"/>
+                <a:lumMod val="105000"/>
+                <a:satMod val="109000"/>
+                <a:tint val="81000"/>
               </a:schemeClr>
             </a:gs>
           </a:gsLst>
-          <a:lin ang="16200000" scaled="1"/>
+          <a:lin ang="5400000" scaled="0"/>
         </a:gradFill>
         <a:gradFill rotWithShape="1">
           <a:gsLst>
             <a:gs pos="0">
               <a:schemeClr val="phClr">
-                <a:tint val="100000"/>
+                <a:satMod val="103000"/>
+                <a:lumMod val="102000"/>
+                <a:tint val="94000"/>
+              </a:schemeClr>
+            </a:gs>
+            <a:gs pos="50000">
+              <a:schemeClr val="phClr">
+                <a:satMod val="110000"/>
+                <a:lumMod val="100000"/>
                 <a:shade val="100000"/>
-                <a:satMod val="130000"/>
               </a:schemeClr>
             </a:gs>
             <a:gs pos="100000">
               <a:schemeClr val="phClr">
-                <a:tint val="50000"/>
-                <a:shade val="100000"/>
-                <a:satMod val="350000"/>
+                <a:lumMod val="99000"/>
+                <a:satMod val="120000"/>
+                <a:shade val="78000"/>
               </a:schemeClr>
             </a:gs>
           </a:gsLst>
-          <a:lin ang="16200000" scaled="0"/>
+          <a:lin ang="5400000" scaled="0"/>
         </a:gradFill>
       </a:fillStyleLst>
       <a:lnStyleLst>
-        <a:ln w="9525" cap="flat" cmpd="sng" algn="ctr">
+        <a:ln w="12700" cap="flat" cmpd="sng" algn="ctr">
           <a:solidFill>
-            <a:schemeClr val="phClr">
-              <a:shade val="95000"/>
-              <a:satMod val="105000"/>
-            </a:schemeClr>
+            <a:schemeClr val="phClr"/>
           </a:solidFill>
           <a:prstDash val="solid"/>
+          <a:miter lim="800000"/>
+        </a:ln>
+        <a:ln w="19050" cap="flat" cmpd="sng" algn="ctr">
+          <a:solidFill>
+            <a:schemeClr val="phClr"/>
+          </a:solidFill>
+          <a:prstDash val="solid"/>
+          <a:miter lim="800000"/>
         </a:ln>
         <a:ln w="25400" cap="flat" cmpd="sng" algn="ctr">
           <a:solidFill>
             <a:schemeClr val="phClr"/>
           </a:solidFill>
           <a:prstDash val="solid"/>
-        </a:ln>
-        <a:ln w="38100" cap="flat" cmpd="sng" algn="ctr">
-          <a:solidFill>
-            <a:schemeClr val="phClr"/>
-          </a:solidFill>
-          <a:prstDash val="solid"/>
+          <a:miter lim="800000"/>
         </a:ln>
       </a:lnStyleLst>
       <a:effectStyleLst>
         <a:effectStyle>
+          <a:effectLst/>
+        </a:effectStyle>
+        <a:effectStyle>
+          <a:effectLst/>
+        </a:effectStyle>
+        <a:effectStyle>
           <a:effectLst>
-            <a:outerShdw blurRad="40000" dist="20000" dir="5400000" rotWithShape="0">
+            <a:outerShdw blurRad="57150" dist="19050" dir="5400000" algn="ctr" rotWithShape="0">
               <a:srgbClr val="000000">
-                <a:alpha val="38000"/>
+                <a:alpha val="63000"/>
               </a:srgbClr>
             </a:outerShdw>
           </a:effectLst>
-        </a:effectStyle>
-        <a:effectStyle>
-          <a:effectLst>
-            <a:outerShdw blurRad="40000" dist="23000" dir="5400000" rotWithShape="0">
-              <a:srgbClr val="000000">
-                <a:alpha val="35000"/>
-              </a:srgbClr>
-            </a:outerShdw>
-          </a:effectLst>
-        </a:effectStyle>
-        <a:effectStyle>
-          <a:effectLst>
-            <a:outerShdw blurRad="40000" dist="23000" dir="5400000" rotWithShape="0">
-              <a:srgbClr val="000000">
-                <a:alpha val="35000"/>
-              </a:srgbClr>
-            </a:outerShdw>
-          </a:effectLst>
-          <a:scene3d>
-            <a:camera prst="orthographicFront">
-              <a:rot lat="0" lon="0" rev="0"/>
-            </a:camera>
-            <a:lightRig rig="threePt" dir="t">
-              <a:rot lat="0" lon="0" rev="1200000"/>
-            </a:lightRig>
-          </a:scene3d>
-          <a:sp3d>
-            <a:bevelT w="63500" h="25400"/>
-          </a:sp3d>
         </a:effectStyle>
       </a:effectStyleLst>
       <a:bgFillStyleLst>
         <a:solidFill>
           <a:schemeClr val="phClr"/>
         </a:solidFill>
+        <a:solidFill>
+          <a:schemeClr val="phClr">
+            <a:tint val="95000"/>
+            <a:satMod val="170000"/>
+          </a:schemeClr>
+        </a:solidFill>
         <a:gradFill rotWithShape="1">
           <a:gsLst>
             <a:gs pos="0">
               <a:schemeClr val="phClr">
-                <a:tint val="40000"/>
-                <a:satMod val="350000"/>
+                <a:tint val="93000"/>
+                <a:satMod val="150000"/>
+                <a:shade val="98000"/>
+                <a:lumMod val="102000"/>
               </a:schemeClr>
             </a:gs>
-            <a:gs pos="40000">
+            <a:gs pos="50000">
               <a:schemeClr val="phClr">
-                <a:tint val="45000"/>
-                <a:shade val="99000"/>
-                <a:satMod val="350000"/>
+                <a:tint val="98000"/>
+                <a:satMod val="130000"/>
+                <a:shade val="90000"/>
+                <a:lumMod val="103000"/>
               </a:schemeClr>
             </a:gs>
             <a:gs pos="100000">
               <a:schemeClr val="phClr">
-                <a:shade val="20000"/>
-                <a:satMod val="255000"/>
+                <a:shade val="63000"/>
+                <a:satMod val="120000"/>
               </a:schemeClr>
             </a:gs>
           </a:gsLst>
-          <a:path path="circle">
-            <a:fillToRect l="50000" t="-80000" r="50000" b="180000"/>
-          </a:path>
-        </a:gradFill>
-        <a:gradFill rotWithShape="1">
-          <a:gsLst>
-            <a:gs pos="0">
-              <a:schemeClr val="phClr">
-                <a:tint val="80000"/>
-                <a:satMod val="300000"/>
-              </a:schemeClr>
-            </a:gs>
-            <a:gs pos="100000">
-              <a:schemeClr val="phClr">
-                <a:shade val="30000"/>
-                <a:satMod val="200000"/>
-              </a:schemeClr>
-            </a:gs>
-          </a:gsLst>
-          <a:path path="circle">
-            <a:fillToRect l="50000" t="50000" r="50000" b="50000"/>
-          </a:path>
+          <a:lin ang="5400000" scaled="0"/>
         </a:gradFill>
       </a:bgFillStyleLst>
     </a:fmtScheme>
   </a:themeElements>
   <a:objectDefaults>
-    <a:spDef>
-      <a:spPr/>
-      <a:bodyPr/>
-      <a:lstStyle/>
-      <a:style>
-        <a:lnRef idx="1">
-          <a:schemeClr val="accent1"/>
-        </a:lnRef>
-        <a:fillRef idx="3">
-          <a:schemeClr val="accent1"/>
-        </a:fillRef>
-        <a:effectRef idx="2">
-          <a:schemeClr val="accent1"/>
-        </a:effectRef>
-        <a:fontRef idx="minor">
-          <a:schemeClr val="lt1"/>
-        </a:fontRef>
-      </a:style>
-    </a:spDef>
     <a:lnDef>
       <a:spPr/>
       <a:bodyPr/>
@@ -12593,5 +12162,10 @@
     </a:lnDef>
   </a:objectDefaults>
   <a:extraClrSchemeLst/>
+  <a:extLst>
+    <a:ext uri="{05A4C25C-085E-4340-85A3-A5531E510DB2}">
+      <thm15:themeFamily xmlns:thm15="http://schemas.microsoft.com/office/thememl/2012/main" name="Office Theme" id="{2E142A2C-CD16-42D6-873A-C26D2A0506FA}" vid="{1BDDFF52-6CD6-40A5-AB3C-68EB2F1E4D0A}"/>
+    </a:ext>
+  </a:extLst>
 </a:theme>
 </file>